--- a/slides/7_state_space.pptx
+++ b/slides/7_state_space.pptx
@@ -5,7 +5,7 @@
     <p:sldMasterId id="2147483648" r:id="rId1"/>
   </p:sldMasterIdLst>
   <p:notesMasterIdLst>
-    <p:notesMasterId r:id="rId26"/>
+    <p:notesMasterId r:id="rId24"/>
   </p:notesMasterIdLst>
   <p:sldIdLst>
     <p:sldId id="256" r:id="rId2"/>
@@ -28,10 +28,8 @@
     <p:sldId id="283" r:id="rId19"/>
     <p:sldId id="276" r:id="rId20"/>
     <p:sldId id="285" r:id="rId21"/>
-    <p:sldId id="288" r:id="rId22"/>
-    <p:sldId id="290" r:id="rId23"/>
-    <p:sldId id="291" r:id="rId24"/>
-    <p:sldId id="289" r:id="rId25"/>
+    <p:sldId id="290" r:id="rId22"/>
+    <p:sldId id="289" r:id="rId23"/>
   </p:sldIdLst>
   <p:sldSz cx="12192000" cy="6858000"/>
   <p:notesSz cx="6858000" cy="9144000"/>
@@ -502,7 +500,7 @@
           <a:p>
             <a:fld id="{506E0FD1-891F-4B1E-916D-E9B585160BB8}" type="datetimeFigureOut">
               <a:rPr lang="en-GB" smtClean="0"/>
-              <a:t>04/04/2026</a:t>
+              <a:t>05/04/2026</a:t>
             </a:fld>
             <a:endParaRPr lang="en-GB"/>
           </a:p>
@@ -919,7 +917,7 @@
           <a:p>
             <a:fld id="{D68C3F22-27B2-44E3-9C5F-D08126455F6F}" type="datetime1">
               <a:rPr lang="en-GB" smtClean="0"/>
-              <a:t>04/04/2026</a:t>
+              <a:t>05/04/2026</a:t>
             </a:fld>
             <a:endParaRPr lang="en-GB"/>
           </a:p>
@@ -1119,7 +1117,7 @@
           <a:p>
             <a:fld id="{1CD03846-7BF6-4FB6-A921-FF3379ADBD4C}" type="datetime1">
               <a:rPr lang="en-GB" smtClean="0"/>
-              <a:t>04/04/2026</a:t>
+              <a:t>05/04/2026</a:t>
             </a:fld>
             <a:endParaRPr lang="en-GB"/>
           </a:p>
@@ -1329,7 +1327,7 @@
           <a:p>
             <a:fld id="{99E1B91A-3FD0-4144-9C84-63E9688ED2FE}" type="datetime1">
               <a:rPr lang="en-GB" smtClean="0"/>
-              <a:t>04/04/2026</a:t>
+              <a:t>05/04/2026</a:t>
             </a:fld>
             <a:endParaRPr lang="en-GB"/>
           </a:p>
@@ -1529,7 +1527,7 @@
           <a:p>
             <a:fld id="{5295ED7B-FEAD-4734-819F-93EF4B0EA908}" type="datetime1">
               <a:rPr lang="en-GB" smtClean="0"/>
-              <a:t>04/04/2026</a:t>
+              <a:t>05/04/2026</a:t>
             </a:fld>
             <a:endParaRPr lang="en-GB"/>
           </a:p>
@@ -1805,7 +1803,7 @@
           <a:p>
             <a:fld id="{D2D5D4B4-C926-4B45-8815-1ED8911179A2}" type="datetime1">
               <a:rPr lang="en-GB" smtClean="0"/>
-              <a:t>04/04/2026</a:t>
+              <a:t>05/04/2026</a:t>
             </a:fld>
             <a:endParaRPr lang="en-GB"/>
           </a:p>
@@ -2073,7 +2071,7 @@
           <a:p>
             <a:fld id="{B4C5210A-0E37-4935-93AF-69F21A5F712F}" type="datetime1">
               <a:rPr lang="en-GB" smtClean="0"/>
-              <a:t>04/04/2026</a:t>
+              <a:t>05/04/2026</a:t>
             </a:fld>
             <a:endParaRPr lang="en-GB"/>
           </a:p>
@@ -2488,7 +2486,7 @@
           <a:p>
             <a:fld id="{3D3A6B2F-436C-4691-80E8-9C890E000E9D}" type="datetime1">
               <a:rPr lang="en-GB" smtClean="0"/>
-              <a:t>04/04/2026</a:t>
+              <a:t>05/04/2026</a:t>
             </a:fld>
             <a:endParaRPr lang="en-GB"/>
           </a:p>
@@ -2630,7 +2628,7 @@
           <a:p>
             <a:fld id="{84385F4C-D74B-496F-8D21-97E3549C783B}" type="datetime1">
               <a:rPr lang="en-GB" smtClean="0"/>
-              <a:t>04/04/2026</a:t>
+              <a:t>05/04/2026</a:t>
             </a:fld>
             <a:endParaRPr lang="en-GB"/>
           </a:p>
@@ -2743,7 +2741,7 @@
           <a:p>
             <a:fld id="{0CBDCB32-C241-4703-A832-4EB47BD54E83}" type="datetime1">
               <a:rPr lang="en-GB" smtClean="0"/>
-              <a:t>04/04/2026</a:t>
+              <a:t>05/04/2026</a:t>
             </a:fld>
             <a:endParaRPr lang="en-GB"/>
           </a:p>
@@ -3056,7 +3054,7 @@
           <a:p>
             <a:fld id="{85C150FF-BE95-4D25-A16A-E368A81CBF24}" type="datetime1">
               <a:rPr lang="en-GB" smtClean="0"/>
-              <a:t>04/04/2026</a:t>
+              <a:t>05/04/2026</a:t>
             </a:fld>
             <a:endParaRPr lang="en-GB"/>
           </a:p>
@@ -3345,7 +3343,7 @@
           <a:p>
             <a:fld id="{F3C5DB4B-B349-43C9-A424-BADA723AD9F1}" type="datetime1">
               <a:rPr lang="en-GB" smtClean="0"/>
-              <a:t>04/04/2026</a:t>
+              <a:t>05/04/2026</a:t>
             </a:fld>
             <a:endParaRPr lang="en-GB"/>
           </a:p>
@@ -3588,7 +3586,7 @@
           <a:p>
             <a:fld id="{12632426-0A0C-405F-A3D0-2D11AA44702A}" type="datetime1">
               <a:rPr lang="en-GB" smtClean="0"/>
-              <a:t>04/04/2026</a:t>
+              <a:t>05/04/2026</a:t>
             </a:fld>
             <a:endParaRPr lang="en-GB"/>
           </a:p>
@@ -4131,8 +4129,8 @@
           </a:p>
         </p:txBody>
       </p:sp>
-      <mc:AlternateContent xmlns:mc="http://schemas.openxmlformats.org/markup-compatibility/2006">
-        <mc:Choice xmlns:a14="http://schemas.microsoft.com/office/drawing/2010/main" Requires="a14">
+      <mc:AlternateContent xmlns:mc="http://schemas.openxmlformats.org/markup-compatibility/2006" xmlns:a14="http://schemas.microsoft.com/office/drawing/2010/main">
+        <mc:Choice Requires="a14">
           <p:sp>
             <p:nvSpPr>
               <p:cNvPr id="3" name="Inhaltsplatzhalter 2">
@@ -5075,7 +5073,7 @@
             </p:txBody>
           </p:sp>
         </mc:Choice>
-        <mc:Fallback>
+        <mc:Fallback xmlns="">
           <p:sp>
             <p:nvSpPr>
               <p:cNvPr id="3" name="Inhaltsplatzhalter 2">
@@ -5214,8 +5212,8 @@
           </a:p>
         </p:txBody>
       </p:sp>
-      <mc:AlternateContent xmlns:mc="http://schemas.openxmlformats.org/markup-compatibility/2006">
-        <mc:Choice xmlns:a14="http://schemas.microsoft.com/office/drawing/2010/main" Requires="a14">
+      <mc:AlternateContent xmlns:mc="http://schemas.openxmlformats.org/markup-compatibility/2006" xmlns:a14="http://schemas.microsoft.com/office/drawing/2010/main">
+        <mc:Choice Requires="a14">
           <p:sp>
             <p:nvSpPr>
               <p:cNvPr id="3" name="Inhaltsplatzhalter 2">
@@ -6059,7 +6057,7 @@
             </p:txBody>
           </p:sp>
         </mc:Choice>
-        <mc:Fallback>
+        <mc:Fallback xmlns="">
           <p:sp>
             <p:nvSpPr>
               <p:cNvPr id="3" name="Inhaltsplatzhalter 2">
@@ -6233,8 +6231,8 @@
           </a:p>
         </p:txBody>
       </p:sp>
-      <mc:AlternateContent xmlns:mc="http://schemas.openxmlformats.org/markup-compatibility/2006">
-        <mc:Choice xmlns:a14="http://schemas.microsoft.com/office/drawing/2010/main" Requires="a14">
+      <mc:AlternateContent xmlns:mc="http://schemas.openxmlformats.org/markup-compatibility/2006" xmlns:a14="http://schemas.microsoft.com/office/drawing/2010/main">
+        <mc:Choice Requires="a14">
           <p:sp>
             <p:nvSpPr>
               <p:cNvPr id="3" name="Inhaltsplatzhalter 2">
@@ -7124,7 +7122,7 @@
             </p:txBody>
           </p:sp>
         </mc:Choice>
-        <mc:Fallback>
+        <mc:Fallback xmlns="">
           <p:sp>
             <p:nvSpPr>
               <p:cNvPr id="3" name="Inhaltsplatzhalter 2">
@@ -8051,7 +8049,12 @@
                 <p:ph idx="1"/>
               </p:nvPr>
             </p:nvSpPr>
-            <p:spPr/>
+            <p:spPr>
+              <a:xfrm>
+                <a:off x="838200" y="1707641"/>
+                <a:ext cx="10515600" cy="4351338"/>
+              </a:xfrm>
+            </p:spPr>
             <p:txBody>
               <a:bodyPr>
                 <a:normAutofit/>
@@ -8227,12 +8230,6 @@
                     </m:r>
                   </m:oMath>
                 </a14:m>
-                <a:endParaRPr lang="de-DE" dirty="0"/>
-              </a:p>
-              <a:p>
-                <a:pPr marL="0" indent="0">
-                  <a:buNone/>
-                </a:pPr>
                 <a:endParaRPr lang="de-DE" dirty="0"/>
               </a:p>
               <a:p>
@@ -8348,6 +8345,10 @@
               </p:nvPr>
             </p:nvSpPr>
             <p:spPr>
+              <a:xfrm>
+                <a:off x="838200" y="1707641"/>
+                <a:ext cx="10515600" cy="4351338"/>
+              </a:xfrm>
               <a:blipFill>
                 <a:blip r:embed="rId2"/>
                 <a:stretch>
@@ -8415,7 +8416,7 @@
             </p:nvSpPr>
             <p:spPr>
               <a:xfrm>
-                <a:off x="6279410" y="3212647"/>
+                <a:off x="6279410" y="2927514"/>
                 <a:ext cx="4662380" cy="1384995"/>
               </a:xfrm>
               <a:prstGeom prst="rect">
@@ -8565,7 +8566,7 @@
             </p:nvSpPr>
             <p:spPr>
               <a:xfrm>
-                <a:off x="6279410" y="3212647"/>
+                <a:off x="6279410" y="2927514"/>
                 <a:ext cx="4662380" cy="1384995"/>
               </a:xfrm>
               <a:prstGeom prst="rect">
@@ -8574,7 +8575,282 @@
               <a:blipFill>
                 <a:blip r:embed="rId3"/>
                 <a:stretch>
-                  <a:fillRect l="-2432" t="-4505" r="-2162" b="-10811"/>
+                  <a:fillRect l="-2432" t="-3604" r="-2162" b="-11712"/>
+                </a:stretch>
+              </a:blipFill>
+              <a:ln>
+                <a:solidFill>
+                  <a:schemeClr val="tx1"/>
+                </a:solidFill>
+              </a:ln>
+            </p:spPr>
+            <p:txBody>
+              <a:bodyPr/>
+              <a:lstStyle/>
+              <a:p>
+                <a:r>
+                  <a:rPr lang="de-DE">
+                    <a:noFill/>
+                  </a:rPr>
+                  <a:t> </a:t>
+                </a:r>
+              </a:p>
+            </p:txBody>
+          </p:sp>
+        </mc:Fallback>
+      </mc:AlternateContent>
+      <p:pic>
+        <p:nvPicPr>
+          <p:cNvPr id="7" name="Grafik 6">
+            <a:extLst>
+              <a:ext uri="{FF2B5EF4-FFF2-40B4-BE49-F238E27FC236}">
+                <a16:creationId xmlns:a16="http://schemas.microsoft.com/office/drawing/2014/main" id="{2B0B7288-5834-8AFF-6D38-30830AFE4F50}"/>
+              </a:ext>
+            </a:extLst>
+          </p:cNvPr>
+          <p:cNvPicPr>
+            <a:picLocks noChangeAspect="1"/>
+          </p:cNvPicPr>
+          <p:nvPr/>
+        </p:nvPicPr>
+        <p:blipFill>
+          <a:blip r:embed="rId4">
+            <a:extLst>
+              <a:ext uri="{28A0092B-C50C-407E-A947-70E740481C1C}">
+                <a14:useLocalDpi xmlns:a14="http://schemas.microsoft.com/office/drawing/2010/main" val="0"/>
+              </a:ext>
+            </a:extLst>
+          </a:blip>
+          <a:stretch>
+            <a:fillRect/>
+          </a:stretch>
+        </p:blipFill>
+        <p:spPr>
+          <a:xfrm>
+            <a:off x="3060290" y="5377380"/>
+            <a:ext cx="6071419" cy="1480620"/>
+          </a:xfrm>
+          <a:prstGeom prst="rect">
+            <a:avLst/>
+          </a:prstGeom>
+        </p:spPr>
+      </p:pic>
+      <mc:AlternateContent xmlns:mc="http://schemas.openxmlformats.org/markup-compatibility/2006">
+        <mc:Choice xmlns:a14="http://schemas.microsoft.com/office/drawing/2010/main" Requires="a14">
+          <p:sp>
+            <p:nvSpPr>
+              <p:cNvPr id="8" name="Textfeld 7">
+                <a:extLst>
+                  <a:ext uri="{FF2B5EF4-FFF2-40B4-BE49-F238E27FC236}">
+                    <a16:creationId xmlns:a16="http://schemas.microsoft.com/office/drawing/2014/main" id="{EDD110BE-319D-2AF5-E4AE-66B5A4BC39B2}"/>
+                  </a:ext>
+                </a:extLst>
+              </p:cNvPr>
+              <p:cNvSpPr txBox="1"/>
+              <p:nvPr/>
+            </p:nvSpPr>
+            <p:spPr>
+              <a:xfrm>
+                <a:off x="8370938" y="501820"/>
+                <a:ext cx="3222523" cy="2062103"/>
+              </a:xfrm>
+              <a:prstGeom prst="rect">
+                <a:avLst/>
+              </a:prstGeom>
+              <a:noFill/>
+              <a:ln>
+                <a:solidFill>
+                  <a:schemeClr val="tx1"/>
+                </a:solidFill>
+              </a:ln>
+            </p:spPr>
+            <p:txBody>
+              <a:bodyPr wrap="square" rtlCol="0">
+                <a:spAutoFit/>
+              </a:bodyPr>
+              <a:lstStyle/>
+              <a:p>
+                <a:r>
+                  <a:rPr lang="de-DE" sz="2800" dirty="0"/>
+                  <a:t>Typically:</a:t>
+                </a:r>
+              </a:p>
+              <a:p>
+                <a:pPr/>
+                <a14:m>
+                  <m:oMathPara xmlns:m="http://schemas.openxmlformats.org/officeDocument/2006/math">
+                    <m:oMathParaPr>
+                      <m:jc m:val="left"/>
+                    </m:oMathParaPr>
+                    <m:oMath xmlns:m="http://schemas.openxmlformats.org/officeDocument/2006/math">
+                      <m:r>
+                        <a:rPr lang="de-DE" sz="2800" b="0" i="1" smtClean="0">
+                          <a:latin typeface="Cambria Math" panose="02040503050406030204" pitchFamily="18" charset="0"/>
+                        </a:rPr>
+                        <m:t>𝑥</m:t>
+                      </m:r>
+                      <m:r>
+                        <a:rPr lang="de-DE" sz="2800" b="0" i="1" smtClean="0">
+                          <a:latin typeface="Cambria Math" panose="02040503050406030204" pitchFamily="18" charset="0"/>
+                        </a:rPr>
+                        <m:t>=</m:t>
+                      </m:r>
+                      <m:sSub>
+                        <m:sSubPr>
+                          <m:ctrlPr>
+                            <a:rPr lang="de-DE" sz="2800" b="0" i="1" smtClean="0">
+                              <a:latin typeface="Cambria Math" panose="02040503050406030204" pitchFamily="18" charset="0"/>
+                            </a:rPr>
+                          </m:ctrlPr>
+                        </m:sSubPr>
+                        <m:e>
+                          <m:r>
+                            <a:rPr lang="de-DE" sz="2800" b="0" i="1" smtClean="0">
+                              <a:latin typeface="Cambria Math" panose="02040503050406030204" pitchFamily="18" charset="0"/>
+                            </a:rPr>
+                            <m:t>𝑥</m:t>
+                          </m:r>
+                        </m:e>
+                        <m:sub>
+                          <m:r>
+                            <m:rPr>
+                              <m:sty m:val="p"/>
+                            </m:rPr>
+                            <a:rPr lang="de-DE" sz="2800" b="0" i="0" smtClean="0">
+                              <a:latin typeface="Cambria Math" panose="02040503050406030204" pitchFamily="18" charset="0"/>
+                            </a:rPr>
+                            <m:t>real</m:t>
+                          </m:r>
+                        </m:sub>
+                      </m:sSub>
+                      <m:r>
+                        <a:rPr lang="de-DE" sz="2800" b="0" i="1" smtClean="0">
+                          <a:latin typeface="Cambria Math" panose="02040503050406030204" pitchFamily="18" charset="0"/>
+                        </a:rPr>
+                        <m:t>−</m:t>
+                      </m:r>
+                      <m:sSub>
+                        <m:sSubPr>
+                          <m:ctrlPr>
+                            <a:rPr lang="de-DE" sz="2800" b="0" i="1" smtClean="0">
+                              <a:latin typeface="Cambria Math" panose="02040503050406030204" pitchFamily="18" charset="0"/>
+                            </a:rPr>
+                          </m:ctrlPr>
+                        </m:sSubPr>
+                        <m:e>
+                          <m:r>
+                            <a:rPr lang="de-DE" sz="2800" b="0" i="1" smtClean="0">
+                              <a:latin typeface="Cambria Math" panose="02040503050406030204" pitchFamily="18" charset="0"/>
+                            </a:rPr>
+                            <m:t>𝑥</m:t>
+                          </m:r>
+                        </m:e>
+                        <m:sub>
+                          <m:r>
+                            <m:rPr>
+                              <m:sty m:val="p"/>
+                            </m:rPr>
+                            <a:rPr lang="de-DE" sz="2800" b="0" i="0" smtClean="0">
+                              <a:latin typeface="Cambria Math" panose="02040503050406030204" pitchFamily="18" charset="0"/>
+                            </a:rPr>
+                            <m:t>desired</m:t>
+                          </m:r>
+                        </m:sub>
+                      </m:sSub>
+                    </m:oMath>
+                  </m:oMathPara>
+                </a14:m>
+                <a:endParaRPr lang="de-DE" sz="2800" dirty="0"/>
+              </a:p>
+              <a:p>
+                <a:pPr/>
+                <a:endParaRPr lang="de-DE" sz="2400" dirty="0"/>
+              </a:p>
+              <a:p>
+                <a:pPr/>
+                <a:r>
+                  <a:rPr lang="de-DE" sz="2400" dirty="0">
+                    <a:sym typeface="Wingdings" pitchFamily="2" charset="2"/>
+                  </a:rPr>
+                  <a:t> </a:t>
+                </a:r>
+                <a:r>
+                  <a:rPr lang="de-DE" sz="2400" dirty="0"/>
+                  <a:t>Shift </a:t>
+                </a:r>
+                <a:r>
+                  <a:rPr lang="de-DE" sz="2400" dirty="0" err="1"/>
+                  <a:t>coordinates</a:t>
+                </a:r>
+                <a:r>
+                  <a:rPr lang="de-DE" sz="2400" dirty="0"/>
+                  <a:t> </a:t>
+                </a:r>
+                <a:r>
+                  <a:rPr lang="de-DE" sz="2400" dirty="0" err="1"/>
+                  <a:t>to</a:t>
+                </a:r>
+                <a:r>
+                  <a:rPr lang="de-DE" sz="2400" dirty="0"/>
+                  <a:t> </a:t>
+                </a:r>
+                <a:r>
+                  <a:rPr lang="de-DE" sz="2400" dirty="0" err="1"/>
+                  <a:t>stabilize</a:t>
+                </a:r>
+                <a:r>
+                  <a:rPr lang="de-DE" sz="2400" dirty="0"/>
+                  <a:t> at </a:t>
+                </a:r>
+                <a14:m>
+                  <m:oMath xmlns:m="http://schemas.openxmlformats.org/officeDocument/2006/math">
+                    <m:r>
+                      <a:rPr lang="de-DE" sz="2400" b="0" i="1" smtClean="0">
+                        <a:latin typeface="Cambria Math" panose="02040503050406030204" pitchFamily="18" charset="0"/>
+                      </a:rPr>
+                      <m:t>𝑥</m:t>
+                    </m:r>
+                    <m:r>
+                      <a:rPr lang="de-DE" sz="2400" b="0" i="1" smtClean="0">
+                        <a:latin typeface="Cambria Math" panose="02040503050406030204" pitchFamily="18" charset="0"/>
+                        <a:ea typeface="Cambria Math" panose="02040503050406030204" pitchFamily="18" charset="0"/>
+                      </a:rPr>
+                      <m:t>≠0</m:t>
+                    </m:r>
+                  </m:oMath>
+                </a14:m>
+                <a:endParaRPr lang="de-DE" sz="2400" dirty="0"/>
+              </a:p>
+            </p:txBody>
+          </p:sp>
+        </mc:Choice>
+        <mc:Fallback>
+          <p:sp>
+            <p:nvSpPr>
+              <p:cNvPr id="8" name="Textfeld 7">
+                <a:extLst>
+                  <a:ext uri="{FF2B5EF4-FFF2-40B4-BE49-F238E27FC236}">
+                    <a16:creationId xmlns:a16="http://schemas.microsoft.com/office/drawing/2014/main" id="{EDD110BE-319D-2AF5-E4AE-66B5A4BC39B2}"/>
+                  </a:ext>
+                </a:extLst>
+              </p:cNvPr>
+              <p:cNvSpPr txBox="1">
+                <a:spLocks noRot="1" noChangeAspect="1" noMove="1" noResize="1" noEditPoints="1" noAdjustHandles="1" noChangeArrowheads="1" noChangeShapeType="1" noTextEdit="1"/>
+              </p:cNvSpPr>
+              <p:nvPr/>
+            </p:nvSpPr>
+            <p:spPr>
+              <a:xfrm>
+                <a:off x="8370938" y="501820"/>
+                <a:ext cx="3222523" cy="2062103"/>
+              </a:xfrm>
+              <a:prstGeom prst="rect">
+                <a:avLst/>
+              </a:prstGeom>
+              <a:blipFill>
+                <a:blip r:embed="rId5"/>
+                <a:stretch>
+                  <a:fillRect l="-3906" t="-2424" b="-5455"/>
                 </a:stretch>
               </a:blipFill>
               <a:ln>
@@ -8656,8 +8932,8 @@
           </a:p>
         </p:txBody>
       </p:sp>
-      <mc:AlternateContent xmlns:mc="http://schemas.openxmlformats.org/markup-compatibility/2006">
-        <mc:Choice xmlns:a14="http://schemas.microsoft.com/office/drawing/2010/main" Requires="a14">
+      <mc:AlternateContent xmlns:mc="http://schemas.openxmlformats.org/markup-compatibility/2006" xmlns:a14="http://schemas.microsoft.com/office/drawing/2010/main">
+        <mc:Choice Requires="a14">
           <p:sp>
             <p:nvSpPr>
               <p:cNvPr id="3" name="Inhaltsplatzhalter 2">
@@ -9001,7 +9277,7 @@
             </p:txBody>
           </p:sp>
         </mc:Choice>
-        <mc:Fallback>
+        <mc:Fallback xmlns="">
           <p:sp>
             <p:nvSpPr>
               <p:cNvPr id="3" name="Inhaltsplatzhalter 2">
@@ -9123,13 +9399,18 @@
           <a:p>
             <a:r>
               <a:rPr lang="de-DE" dirty="0"/>
-              <a:t>Derivation</a:t>
-            </a:r>
+              <a:t>Matrix </a:t>
+            </a:r>
+            <a:r>
+              <a:rPr lang="de-DE" dirty="0" err="1"/>
+              <a:t>Exponential</a:t>
+            </a:r>
+            <a:endParaRPr lang="de-DE" dirty="0"/>
           </a:p>
         </p:txBody>
       </p:sp>
-      <mc:AlternateContent xmlns:mc="http://schemas.openxmlformats.org/markup-compatibility/2006">
-        <mc:Choice xmlns:a14="http://schemas.microsoft.com/office/drawing/2010/main" Requires="a14">
+      <mc:AlternateContent xmlns:mc="http://schemas.openxmlformats.org/markup-compatibility/2006" xmlns:a14="http://schemas.microsoft.com/office/drawing/2010/main">
+        <mc:Choice Requires="a14">
           <p:sp>
             <p:nvSpPr>
               <p:cNvPr id="3" name="Inhaltsplatzhalter 2">
@@ -9496,15 +9777,172 @@
                 <a:pPr marL="0" indent="0">
                   <a:buNone/>
                 </a:pPr>
+                <a:endParaRPr lang="de-DE" dirty="0"/>
+              </a:p>
+              <a:p>
+                <a:pPr marL="0" indent="0">
+                  <a:buNone/>
+                </a:pPr>
                 <a:r>
                   <a:rPr lang="de-DE" dirty="0"/>
-                  <a:t>…</a:t>
-                </a:r>
+                  <a:t>Solution </a:t>
+                </a:r>
+                <a:r>
+                  <a:rPr lang="de-DE" dirty="0" err="1"/>
+                  <a:t>of</a:t>
+                </a:r>
+                <a:r>
+                  <a:rPr lang="de-DE" dirty="0"/>
+                  <a:t> </a:t>
+                </a:r>
+                <a:r>
+                  <a:rPr lang="de-DE" dirty="0" err="1"/>
+                  <a:t>the</a:t>
+                </a:r>
+                <a:r>
+                  <a:rPr lang="de-DE" dirty="0"/>
+                  <a:t> </a:t>
+                </a:r>
+                <a:r>
+                  <a:rPr lang="de-DE" dirty="0" err="1"/>
+                  <a:t>system</a:t>
+                </a:r>
+                <a:r>
+                  <a:rPr lang="de-DE" dirty="0"/>
+                  <a:t>:</a:t>
+                </a:r>
+              </a:p>
+              <a:p>
+                <a:pPr marL="0" indent="0">
+                  <a:buNone/>
+                </a:pPr>
+                <a:r>
+                  <a:rPr lang="de-DE" b="0" dirty="0"/>
+                  <a:t>	</a:t>
+                </a:r>
+                <a14:m>
+                  <m:oMath xmlns:m="http://schemas.openxmlformats.org/officeDocument/2006/math">
+                    <m:r>
+                      <a:rPr lang="de-DE" b="0" i="1" smtClean="0">
+                        <a:latin typeface="Cambria Math" panose="02040503050406030204" pitchFamily="18" charset="0"/>
+                      </a:rPr>
+                      <m:t>𝑥</m:t>
+                    </m:r>
+                    <m:d>
+                      <m:dPr>
+                        <m:ctrlPr>
+                          <a:rPr lang="de-DE" b="0" i="1" smtClean="0">
+                            <a:latin typeface="Cambria Math" panose="02040503050406030204" pitchFamily="18" charset="0"/>
+                          </a:rPr>
+                        </m:ctrlPr>
+                      </m:dPr>
+                      <m:e>
+                        <m:r>
+                          <a:rPr lang="de-DE" b="0" i="1" smtClean="0">
+                            <a:latin typeface="Cambria Math" panose="02040503050406030204" pitchFamily="18" charset="0"/>
+                          </a:rPr>
+                          <m:t>𝑡</m:t>
+                        </m:r>
+                      </m:e>
+                    </m:d>
+                    <m:r>
+                      <a:rPr lang="de-DE" b="0" i="1" smtClean="0">
+                        <a:latin typeface="Cambria Math" panose="02040503050406030204" pitchFamily="18" charset="0"/>
+                      </a:rPr>
+                      <m:t>=</m:t>
+                    </m:r>
+                    <m:sSup>
+                      <m:sSupPr>
+                        <m:ctrlPr>
+                          <a:rPr lang="de-DE" b="0" i="1" smtClean="0">
+                            <a:latin typeface="Cambria Math" panose="02040503050406030204" pitchFamily="18" charset="0"/>
+                          </a:rPr>
+                        </m:ctrlPr>
+                      </m:sSupPr>
+                      <m:e>
+                        <m:r>
+                          <a:rPr lang="de-DE" b="0" i="1" smtClean="0">
+                            <a:latin typeface="Cambria Math" panose="02040503050406030204" pitchFamily="18" charset="0"/>
+                          </a:rPr>
+                          <m:t>𝑒</m:t>
+                        </m:r>
+                      </m:e>
+                      <m:sup>
+                        <m:d>
+                          <m:dPr>
+                            <m:ctrlPr>
+                              <a:rPr lang="de-DE" b="0" i="1" smtClean="0">
+                                <a:latin typeface="Cambria Math" panose="02040503050406030204" pitchFamily="18" charset="0"/>
+                              </a:rPr>
+                            </m:ctrlPr>
+                          </m:dPr>
+                          <m:e>
+                            <m:r>
+                              <a:rPr lang="de-DE" b="0" i="1" smtClean="0">
+                                <a:latin typeface="Cambria Math" panose="02040503050406030204" pitchFamily="18" charset="0"/>
+                              </a:rPr>
+                              <m:t>𝐴</m:t>
+                            </m:r>
+                            <m:r>
+                              <a:rPr lang="de-DE" b="0" i="1" smtClean="0">
+                                <a:latin typeface="Cambria Math" panose="02040503050406030204" pitchFamily="18" charset="0"/>
+                              </a:rPr>
+                              <m:t>−</m:t>
+                            </m:r>
+                            <m:r>
+                              <a:rPr lang="de-DE" b="0" i="1" smtClean="0">
+                                <a:latin typeface="Cambria Math" panose="02040503050406030204" pitchFamily="18" charset="0"/>
+                              </a:rPr>
+                              <m:t>𝐵</m:t>
+                            </m:r>
+                            <m:r>
+                              <a:rPr lang="de-DE" b="0" i="1" smtClean="0">
+                                <a:latin typeface="Cambria Math" panose="02040503050406030204" pitchFamily="18" charset="0"/>
+                              </a:rPr>
+                              <m:t> </m:t>
+                            </m:r>
+                            <m:r>
+                              <a:rPr lang="de-DE" b="0" i="1" smtClean="0">
+                                <a:latin typeface="Cambria Math" panose="02040503050406030204" pitchFamily="18" charset="0"/>
+                              </a:rPr>
+                              <m:t>𝐾</m:t>
+                            </m:r>
+                          </m:e>
+                        </m:d>
+                        <m:r>
+                          <a:rPr lang="de-DE" b="0" i="1" smtClean="0">
+                            <a:latin typeface="Cambria Math" panose="02040503050406030204" pitchFamily="18" charset="0"/>
+                          </a:rPr>
+                          <m:t>𝑡</m:t>
+                        </m:r>
+                      </m:sup>
+                    </m:sSup>
+                    <m:r>
+                      <a:rPr lang="de-DE" b="0" i="1" smtClean="0">
+                        <a:latin typeface="Cambria Math" panose="02040503050406030204" pitchFamily="18" charset="0"/>
+                      </a:rPr>
+                      <m:t> </m:t>
+                    </m:r>
+                    <m:r>
+                      <a:rPr lang="de-DE" b="0" i="1" smtClean="0">
+                        <a:latin typeface="Cambria Math" panose="02040503050406030204" pitchFamily="18" charset="0"/>
+                      </a:rPr>
+                      <m:t>𝑥</m:t>
+                    </m:r>
+                    <m:r>
+                      <a:rPr lang="de-DE" b="0" i="1" smtClean="0">
+                        <a:latin typeface="Cambria Math" panose="02040503050406030204" pitchFamily="18" charset="0"/>
+                      </a:rPr>
+                      <m:t>(0)</m:t>
+                    </m:r>
+                  </m:oMath>
+                </a14:m>
+                <a:endParaRPr lang="de-DE" dirty="0"/>
               </a:p>
             </p:txBody>
           </p:sp>
         </mc:Choice>
-        <mc:Fallback>
+        <mc:Fallback xmlns="">
           <p:sp>
             <p:nvSpPr>
               <p:cNvPr id="3" name="Inhaltsplatzhalter 2">
@@ -9573,6 +10011,1183 @@
           </a:p>
         </p:txBody>
       </p:sp>
+      <p:sp>
+        <p:nvSpPr>
+          <p:cNvPr id="5" name="Textfeld 4">
+            <a:extLst>
+              <a:ext uri="{FF2B5EF4-FFF2-40B4-BE49-F238E27FC236}">
+                <a16:creationId xmlns:a16="http://schemas.microsoft.com/office/drawing/2014/main" id="{9B1543D9-606B-615C-946C-7DAF7FA6F51F}"/>
+              </a:ext>
+            </a:extLst>
+          </p:cNvPr>
+          <p:cNvSpPr txBox="1"/>
+          <p:nvPr/>
+        </p:nvSpPr>
+        <p:spPr>
+          <a:xfrm>
+            <a:off x="838201" y="5221222"/>
+            <a:ext cx="10515600" cy="830997"/>
+          </a:xfrm>
+          <a:prstGeom prst="rect">
+            <a:avLst/>
+          </a:prstGeom>
+          <a:noFill/>
+        </p:spPr>
+        <p:txBody>
+          <a:bodyPr wrap="square" rtlCol="0">
+            <a:spAutoFit/>
+          </a:bodyPr>
+          <a:lstStyle/>
+          <a:p>
+            <a:r>
+              <a:rPr lang="de-DE" sz="2400" dirty="0"/>
+              <a:t>State </a:t>
+            </a:r>
+            <a:r>
+              <a:rPr lang="de-DE" sz="2400" dirty="0" err="1"/>
+              <a:t>transition</a:t>
+            </a:r>
+            <a:r>
+              <a:rPr lang="de-DE" sz="2400" dirty="0"/>
+              <a:t> </a:t>
+            </a:r>
+            <a:r>
+              <a:rPr lang="de-DE" sz="2400" dirty="0" err="1"/>
+              <a:t>matrix</a:t>
+            </a:r>
+            <a:r>
+              <a:rPr lang="de-DE" sz="2400" dirty="0"/>
+              <a:t> in form </a:t>
+            </a:r>
+            <a:r>
+              <a:rPr lang="de-DE" sz="2400" dirty="0" err="1"/>
+              <a:t>of</a:t>
+            </a:r>
+            <a:r>
+              <a:rPr lang="de-DE" sz="2400" dirty="0"/>
+              <a:t> </a:t>
+            </a:r>
+            <a:r>
+              <a:rPr lang="de-DE" sz="2400" dirty="0" err="1"/>
+              <a:t>matrix</a:t>
+            </a:r>
+            <a:r>
+              <a:rPr lang="de-DE" sz="2400" dirty="0"/>
+              <a:t> </a:t>
+            </a:r>
+            <a:r>
+              <a:rPr lang="de-DE" sz="2400" dirty="0" err="1"/>
+              <a:t>exponential</a:t>
+            </a:r>
+            <a:r>
+              <a:rPr lang="de-DE" sz="2400" dirty="0"/>
+              <a:t> (</a:t>
+            </a:r>
+            <a:r>
+              <a:rPr lang="de-DE" sz="2400" dirty="0" err="1"/>
+              <a:t>defined</a:t>
+            </a:r>
+            <a:r>
+              <a:rPr lang="de-DE" sz="2400" dirty="0"/>
+              <a:t> via power </a:t>
+            </a:r>
+            <a:r>
+              <a:rPr lang="de-DE" sz="2400" dirty="0" err="1"/>
+              <a:t>series</a:t>
+            </a:r>
+            <a:r>
+              <a:rPr lang="de-DE" sz="2400" dirty="0"/>
+              <a:t>): </a:t>
+            </a:r>
+            <a:r>
+              <a:rPr lang="de-DE" sz="2400" dirty="0" err="1"/>
+              <a:t>evolution</a:t>
+            </a:r>
+            <a:r>
+              <a:rPr lang="de-DE" sz="2400" dirty="0"/>
+              <a:t> </a:t>
+            </a:r>
+            <a:r>
+              <a:rPr lang="de-DE" sz="2400" dirty="0" err="1"/>
+              <a:t>of</a:t>
+            </a:r>
+            <a:r>
+              <a:rPr lang="de-DE" sz="2400" dirty="0"/>
+              <a:t> a </a:t>
+            </a:r>
+            <a:r>
+              <a:rPr lang="de-DE" sz="2400" dirty="0" err="1"/>
+              <a:t>vector</a:t>
+            </a:r>
+            <a:r>
+              <a:rPr lang="de-DE" sz="2400" dirty="0"/>
+              <a:t> </a:t>
+            </a:r>
+            <a:r>
+              <a:rPr lang="de-DE" sz="2400" dirty="0" err="1"/>
+              <a:t>of</a:t>
+            </a:r>
+            <a:r>
+              <a:rPr lang="de-DE" sz="2400" dirty="0"/>
+              <a:t> </a:t>
+            </a:r>
+            <a:r>
+              <a:rPr lang="de-DE" sz="2400" dirty="0" err="1"/>
+              <a:t>coupled</a:t>
+            </a:r>
+            <a:r>
+              <a:rPr lang="de-DE" sz="2400" dirty="0"/>
+              <a:t> </a:t>
+            </a:r>
+            <a:r>
+              <a:rPr lang="de-DE" sz="2400" dirty="0" err="1"/>
+              <a:t>states</a:t>
+            </a:r>
+            <a:endParaRPr lang="de-DE" sz="2400" dirty="0"/>
+          </a:p>
+        </p:txBody>
+      </p:sp>
+      <p:sp>
+        <p:nvSpPr>
+          <p:cNvPr id="6" name="Geschweifte Klammer links 5">
+            <a:extLst>
+              <a:ext uri="{FF2B5EF4-FFF2-40B4-BE49-F238E27FC236}">
+                <a16:creationId xmlns:a16="http://schemas.microsoft.com/office/drawing/2014/main" id="{55BA1056-83C2-1F33-8E03-D24DBA73ADA9}"/>
+              </a:ext>
+            </a:extLst>
+          </p:cNvPr>
+          <p:cNvSpPr/>
+          <p:nvPr/>
+        </p:nvSpPr>
+        <p:spPr>
+          <a:xfrm rot="16200000">
+            <a:off x="3374587" y="4341862"/>
+            <a:ext cx="461665" cy="1297056"/>
+          </a:xfrm>
+          <a:prstGeom prst="leftBrace">
+            <a:avLst/>
+          </a:prstGeom>
+        </p:spPr>
+        <p:style>
+          <a:lnRef idx="2">
+            <a:schemeClr val="accent1"/>
+          </a:lnRef>
+          <a:fillRef idx="0">
+            <a:schemeClr val="accent1"/>
+          </a:fillRef>
+          <a:effectRef idx="1">
+            <a:schemeClr val="accent1"/>
+          </a:effectRef>
+          <a:fontRef idx="minor">
+            <a:schemeClr val="tx1"/>
+          </a:fontRef>
+        </p:style>
+        <p:txBody>
+          <a:bodyPr rtlCol="0" anchor="ctr"/>
+          <a:lstStyle/>
+          <a:p>
+            <a:pPr algn="ctr"/>
+            <a:endParaRPr lang="de-DE"/>
+          </a:p>
+        </p:txBody>
+      </p:sp>
+      <mc:AlternateContent xmlns:mc="http://schemas.openxmlformats.org/markup-compatibility/2006" xmlns:a14="http://schemas.microsoft.com/office/drawing/2010/main">
+        <mc:Choice Requires="a14">
+          <p:sp>
+            <p:nvSpPr>
+              <p:cNvPr id="7" name="Textfeld 6">
+                <a:extLst>
+                  <a:ext uri="{FF2B5EF4-FFF2-40B4-BE49-F238E27FC236}">
+                    <a16:creationId xmlns:a16="http://schemas.microsoft.com/office/drawing/2014/main" id="{0DA32B27-8890-91BC-FBB4-96E6263CBAEE}"/>
+                  </a:ext>
+                </a:extLst>
+              </p:cNvPr>
+              <p:cNvSpPr txBox="1"/>
+              <p:nvPr/>
+            </p:nvSpPr>
+            <p:spPr>
+              <a:xfrm>
+                <a:off x="5377069" y="3504336"/>
+                <a:ext cx="6698973" cy="830997"/>
+              </a:xfrm>
+              <a:prstGeom prst="rect">
+                <a:avLst/>
+              </a:prstGeom>
+              <a:noFill/>
+            </p:spPr>
+            <p:txBody>
+              <a:bodyPr wrap="square" rtlCol="0">
+                <a:spAutoFit/>
+              </a:bodyPr>
+              <a:lstStyle/>
+              <a:p>
+                <a:r>
+                  <a:rPr lang="de-DE" sz="2400" dirty="0"/>
+                  <a:t>Eigenvalues </a:t>
+                </a:r>
+                <a:r>
+                  <a:rPr lang="de-DE" sz="2400" dirty="0" err="1"/>
+                  <a:t>of</a:t>
+                </a:r>
+                <a:r>
+                  <a:rPr lang="de-DE" sz="2400" dirty="0"/>
+                  <a:t> </a:t>
+                </a:r>
+                <a:r>
+                  <a:rPr lang="de-DE" sz="2400" dirty="0" err="1"/>
+                  <a:t>this</a:t>
+                </a:r>
+                <a:r>
+                  <a:rPr lang="de-DE" sz="2400" dirty="0"/>
+                  <a:t> </a:t>
+                </a:r>
+                <a:r>
+                  <a:rPr lang="de-DE" sz="2400" dirty="0" err="1"/>
+                  <a:t>matrix</a:t>
+                </a:r>
+                <a:r>
+                  <a:rPr lang="de-DE" sz="2400" dirty="0"/>
+                  <a:t> (</a:t>
+                </a:r>
+                <a14:m>
+                  <m:oMath xmlns:m="http://schemas.openxmlformats.org/officeDocument/2006/math">
+                    <m:func>
+                      <m:funcPr>
+                        <m:ctrlPr>
+                          <a:rPr lang="de-DE" sz="2400" i="1" smtClean="0">
+                            <a:latin typeface="Cambria Math" panose="02040503050406030204" pitchFamily="18" charset="0"/>
+                          </a:rPr>
+                        </m:ctrlPr>
+                      </m:funcPr>
+                      <m:fName>
+                        <m:r>
+                          <m:rPr>
+                            <m:sty m:val="p"/>
+                          </m:rPr>
+                          <a:rPr lang="de-DE" sz="2400" b="0" i="0" smtClean="0">
+                            <a:latin typeface="Cambria Math" panose="02040503050406030204" pitchFamily="18" charset="0"/>
+                          </a:rPr>
+                          <m:t>det</m:t>
+                        </m:r>
+                      </m:fName>
+                      <m:e>
+                        <m:d>
+                          <m:dPr>
+                            <m:ctrlPr>
+                              <a:rPr lang="de-DE" sz="2400" i="1" smtClean="0">
+                                <a:latin typeface="Cambria Math" panose="02040503050406030204" pitchFamily="18" charset="0"/>
+                              </a:rPr>
+                            </m:ctrlPr>
+                          </m:dPr>
+                          <m:e>
+                            <m:r>
+                              <a:rPr lang="de-DE" sz="2400" b="0" i="1" smtClean="0">
+                                <a:latin typeface="Cambria Math" panose="02040503050406030204" pitchFamily="18" charset="0"/>
+                              </a:rPr>
+                              <m:t>𝑠</m:t>
+                            </m:r>
+                            <m:r>
+                              <a:rPr lang="de-DE" sz="2400" b="0" i="1" smtClean="0">
+                                <a:latin typeface="Cambria Math" panose="02040503050406030204" pitchFamily="18" charset="0"/>
+                                <a:ea typeface="Cambria Math" panose="02040503050406030204" pitchFamily="18" charset="0"/>
+                              </a:rPr>
+                              <m:t>𝐼</m:t>
+                            </m:r>
+                            <m:r>
+                              <a:rPr lang="de-DE" sz="2400" b="0" i="1" smtClean="0">
+                                <a:latin typeface="Cambria Math" panose="02040503050406030204" pitchFamily="18" charset="0"/>
+                                <a:ea typeface="Cambria Math" panose="02040503050406030204" pitchFamily="18" charset="0"/>
+                              </a:rPr>
+                              <m:t>−</m:t>
+                            </m:r>
+                            <m:r>
+                              <a:rPr lang="de-DE" sz="2400" b="0" i="1" smtClean="0">
+                                <a:latin typeface="Cambria Math" panose="02040503050406030204" pitchFamily="18" charset="0"/>
+                                <a:ea typeface="Cambria Math" panose="02040503050406030204" pitchFamily="18" charset="0"/>
+                              </a:rPr>
+                              <m:t>𝐴</m:t>
+                            </m:r>
+                            <m:r>
+                              <a:rPr lang="de-DE" sz="2400" b="0" i="1" smtClean="0">
+                                <a:latin typeface="Cambria Math" panose="02040503050406030204" pitchFamily="18" charset="0"/>
+                                <a:ea typeface="Cambria Math" panose="02040503050406030204" pitchFamily="18" charset="0"/>
+                              </a:rPr>
+                              <m:t>−</m:t>
+                            </m:r>
+                            <m:r>
+                              <a:rPr lang="de-DE" sz="2400" b="0" i="1" smtClean="0">
+                                <a:latin typeface="Cambria Math" panose="02040503050406030204" pitchFamily="18" charset="0"/>
+                                <a:ea typeface="Cambria Math" panose="02040503050406030204" pitchFamily="18" charset="0"/>
+                              </a:rPr>
+                              <m:t>𝐵𝐾</m:t>
+                            </m:r>
+                          </m:e>
+                        </m:d>
+                        <m:r>
+                          <a:rPr lang="de-DE" sz="2400" b="0" i="1" smtClean="0">
+                            <a:latin typeface="Cambria Math" panose="02040503050406030204" pitchFamily="18" charset="0"/>
+                          </a:rPr>
+                          <m:t>=0</m:t>
+                        </m:r>
+                      </m:e>
+                    </m:func>
+                  </m:oMath>
+                </a14:m>
+                <a:r>
+                  <a:rPr lang="de-DE" sz="2400" dirty="0"/>
+                  <a:t>) correspond </a:t>
+                </a:r>
+                <a:r>
+                  <a:rPr lang="de-DE" sz="2400" dirty="0" err="1"/>
+                  <a:t>to</a:t>
+                </a:r>
+                <a:r>
+                  <a:rPr lang="de-DE" sz="2400" dirty="0"/>
+                  <a:t> </a:t>
+                </a:r>
+                <a:r>
+                  <a:rPr lang="de-DE" sz="2400" dirty="0" err="1"/>
+                  <a:t>closed</a:t>
+                </a:r>
+                <a:r>
+                  <a:rPr lang="de-DE" sz="2400" dirty="0"/>
+                  <a:t>-loop </a:t>
+                </a:r>
+                <a:r>
+                  <a:rPr lang="de-DE" sz="2400" dirty="0" err="1"/>
+                  <a:t>poles</a:t>
+                </a:r>
+                <a:endParaRPr lang="de-DE" sz="2400" dirty="0"/>
+              </a:p>
+            </p:txBody>
+          </p:sp>
+        </mc:Choice>
+        <mc:Fallback xmlns="">
+          <p:sp>
+            <p:nvSpPr>
+              <p:cNvPr id="7" name="Textfeld 6">
+                <a:extLst>
+                  <a:ext uri="{FF2B5EF4-FFF2-40B4-BE49-F238E27FC236}">
+                    <a16:creationId xmlns:a16="http://schemas.microsoft.com/office/drawing/2014/main" id="{0DA32B27-8890-91BC-FBB4-96E6263CBAEE}"/>
+                  </a:ext>
+                </a:extLst>
+              </p:cNvPr>
+              <p:cNvSpPr txBox="1">
+                <a:spLocks noRot="1" noChangeAspect="1" noMove="1" noResize="1" noEditPoints="1" noAdjustHandles="1" noChangeArrowheads="1" noChangeShapeType="1" noTextEdit="1"/>
+              </p:cNvSpPr>
+              <p:nvPr/>
+            </p:nvSpPr>
+            <p:spPr>
+              <a:xfrm>
+                <a:off x="5377069" y="3504336"/>
+                <a:ext cx="6698973" cy="830997"/>
+              </a:xfrm>
+              <a:prstGeom prst="rect">
+                <a:avLst/>
+              </a:prstGeom>
+              <a:blipFill>
+                <a:blip r:embed="rId3"/>
+                <a:stretch>
+                  <a:fillRect l="-1515" t="-6061" r="-1136" b="-16667"/>
+                </a:stretch>
+              </a:blipFill>
+            </p:spPr>
+            <p:txBody>
+              <a:bodyPr/>
+              <a:lstStyle/>
+              <a:p>
+                <a:r>
+                  <a:rPr lang="de-DE">
+                    <a:noFill/>
+                  </a:rPr>
+                  <a:t> </a:t>
+                </a:r>
+              </a:p>
+            </p:txBody>
+          </p:sp>
+        </mc:Fallback>
+      </mc:AlternateContent>
+      <p:sp>
+        <p:nvSpPr>
+          <p:cNvPr id="8" name="Geschweifte Klammer links 7">
+            <a:extLst>
+              <a:ext uri="{FF2B5EF4-FFF2-40B4-BE49-F238E27FC236}">
+                <a16:creationId xmlns:a16="http://schemas.microsoft.com/office/drawing/2014/main" id="{8DD9AFE6-17F3-CBB1-7E17-1A4913EFF96F}"/>
+              </a:ext>
+            </a:extLst>
+          </p:cNvPr>
+          <p:cNvSpPr/>
+          <p:nvPr/>
+        </p:nvSpPr>
+        <p:spPr>
+          <a:xfrm rot="16200000">
+            <a:off x="5731724" y="2670466"/>
+            <a:ext cx="263074" cy="1393136"/>
+          </a:xfrm>
+          <a:prstGeom prst="leftBrace">
+            <a:avLst/>
+          </a:prstGeom>
+        </p:spPr>
+        <p:style>
+          <a:lnRef idx="2">
+            <a:schemeClr val="accent1"/>
+          </a:lnRef>
+          <a:fillRef idx="0">
+            <a:schemeClr val="accent1"/>
+          </a:fillRef>
+          <a:effectRef idx="1">
+            <a:schemeClr val="accent1"/>
+          </a:effectRef>
+          <a:fontRef idx="minor">
+            <a:schemeClr val="tx1"/>
+          </a:fontRef>
+        </p:style>
+        <p:txBody>
+          <a:bodyPr rtlCol="0" anchor="ctr"/>
+          <a:lstStyle/>
+          <a:p>
+            <a:pPr algn="ctr"/>
+            <a:endParaRPr lang="de-DE"/>
+          </a:p>
+        </p:txBody>
+      </p:sp>
+      <mc:AlternateContent xmlns:mc="http://schemas.openxmlformats.org/markup-compatibility/2006" xmlns:a14="http://schemas.microsoft.com/office/drawing/2010/main">
+        <mc:Choice Requires="a14">
+          <p:sp>
+            <p:nvSpPr>
+              <p:cNvPr id="9" name="Textfeld 8">
+                <a:extLst>
+                  <a:ext uri="{FF2B5EF4-FFF2-40B4-BE49-F238E27FC236}">
+                    <a16:creationId xmlns:a16="http://schemas.microsoft.com/office/drawing/2014/main" id="{63B33E71-004B-4058-6B9C-D9A96BE4801A}"/>
+                  </a:ext>
+                </a:extLst>
+              </p:cNvPr>
+              <p:cNvSpPr txBox="1"/>
+              <p:nvPr/>
+            </p:nvSpPr>
+            <p:spPr>
+              <a:xfrm>
+                <a:off x="7772400" y="136527"/>
+                <a:ext cx="4303642" cy="1826206"/>
+              </a:xfrm>
+              <a:prstGeom prst="rect">
+                <a:avLst/>
+              </a:prstGeom>
+              <a:noFill/>
+              <a:ln>
+                <a:solidFill>
+                  <a:schemeClr val="tx1"/>
+                </a:solidFill>
+              </a:ln>
+            </p:spPr>
+            <p:txBody>
+              <a:bodyPr wrap="square" lIns="0" tIns="0" rIns="0" bIns="0" rtlCol="0">
+                <a:spAutoFit/>
+              </a:bodyPr>
+              <a:lstStyle/>
+              <a:p>
+                <a:pPr algn="ctr"/>
+                <a:r>
+                  <a:rPr lang="de-DE" b="0" dirty="0"/>
+                  <a:t>Poles </a:t>
+                </a:r>
+                <a:r>
+                  <a:rPr lang="de-DE" b="0" dirty="0" err="1"/>
+                  <a:t>of</a:t>
+                </a:r>
+                <a:r>
+                  <a:rPr lang="de-DE" b="0" dirty="0"/>
+                  <a:t> </a:t>
+                </a:r>
+                <a:r>
+                  <a:rPr lang="de-DE" b="0" dirty="0" err="1"/>
+                  <a:t>transfer</a:t>
+                </a:r>
+                <a:r>
+                  <a:rPr lang="de-DE" b="0" dirty="0"/>
+                  <a:t> </a:t>
+                </a:r>
+                <a:r>
+                  <a:rPr lang="de-DE" b="0" dirty="0" err="1"/>
+                  <a:t>function</a:t>
+                </a:r>
+                <a:r>
+                  <a:rPr lang="de-DE" b="0" dirty="0"/>
+                  <a:t> (</a:t>
+                </a:r>
+                <a:r>
+                  <a:rPr lang="de-DE" b="0" dirty="0" err="1"/>
+                  <a:t>n</a:t>
+                </a:r>
+                <a:r>
+                  <a:rPr lang="de-DE" dirty="0" err="1"/>
+                  <a:t>o</a:t>
+                </a:r>
+                <a:r>
+                  <a:rPr lang="de-DE" dirty="0"/>
+                  <a:t> </a:t>
+                </a:r>
+                <a:r>
+                  <a:rPr lang="de-DE" dirty="0" err="1"/>
+                  <a:t>feedback</a:t>
+                </a:r>
+                <a:r>
+                  <a:rPr lang="de-DE" b="0" dirty="0"/>
+                  <a:t>):</a:t>
+                </a:r>
+              </a:p>
+              <a:p>
+                <a:r>
+                  <a:rPr lang="de-DE" b="0" dirty="0"/>
+                  <a:t>	</a:t>
+                </a:r>
+                <a14:m>
+                  <m:oMath xmlns:m="http://schemas.openxmlformats.org/officeDocument/2006/math">
+                    <m:r>
+                      <a:rPr lang="de-DE" b="0" i="1" smtClean="0">
+                        <a:latin typeface="Cambria Math" panose="02040503050406030204" pitchFamily="18" charset="0"/>
+                      </a:rPr>
+                      <m:t>𝑠𝑋</m:t>
+                    </m:r>
+                    <m:d>
+                      <m:dPr>
+                        <m:ctrlPr>
+                          <a:rPr lang="de-DE" b="0" i="1" smtClean="0">
+                            <a:latin typeface="Cambria Math" panose="02040503050406030204" pitchFamily="18" charset="0"/>
+                          </a:rPr>
+                        </m:ctrlPr>
+                      </m:dPr>
+                      <m:e>
+                        <m:r>
+                          <a:rPr lang="de-DE" b="0" i="1" smtClean="0">
+                            <a:latin typeface="Cambria Math" panose="02040503050406030204" pitchFamily="18" charset="0"/>
+                          </a:rPr>
+                          <m:t>𝑠</m:t>
+                        </m:r>
+                      </m:e>
+                    </m:d>
+                    <m:r>
+                      <a:rPr lang="de-DE" b="0" i="1" smtClean="0">
+                        <a:latin typeface="Cambria Math" panose="02040503050406030204" pitchFamily="18" charset="0"/>
+                      </a:rPr>
+                      <m:t>=</m:t>
+                    </m:r>
+                    <m:r>
+                      <a:rPr lang="de-DE" b="0" i="1" smtClean="0">
+                        <a:latin typeface="Cambria Math" panose="02040503050406030204" pitchFamily="18" charset="0"/>
+                      </a:rPr>
+                      <m:t>𝐴𝑋</m:t>
+                    </m:r>
+                    <m:d>
+                      <m:dPr>
+                        <m:ctrlPr>
+                          <a:rPr lang="de-DE" b="0" i="1" smtClean="0">
+                            <a:latin typeface="Cambria Math" panose="02040503050406030204" pitchFamily="18" charset="0"/>
+                          </a:rPr>
+                        </m:ctrlPr>
+                      </m:dPr>
+                      <m:e>
+                        <m:r>
+                          <a:rPr lang="de-DE" b="0" i="1" smtClean="0">
+                            <a:latin typeface="Cambria Math" panose="02040503050406030204" pitchFamily="18" charset="0"/>
+                          </a:rPr>
+                          <m:t>𝑠</m:t>
+                        </m:r>
+                      </m:e>
+                    </m:d>
+                    <m:r>
+                      <a:rPr lang="de-DE" b="0" i="1" smtClean="0">
+                        <a:latin typeface="Cambria Math" panose="02040503050406030204" pitchFamily="18" charset="0"/>
+                      </a:rPr>
+                      <m:t>+</m:t>
+                    </m:r>
+                    <m:r>
+                      <a:rPr lang="de-DE" b="0" i="1" smtClean="0">
+                        <a:latin typeface="Cambria Math" panose="02040503050406030204" pitchFamily="18" charset="0"/>
+                      </a:rPr>
+                      <m:t>𝐵𝑈</m:t>
+                    </m:r>
+                    <m:d>
+                      <m:dPr>
+                        <m:ctrlPr>
+                          <a:rPr lang="de-DE" b="0" i="1" smtClean="0">
+                            <a:latin typeface="Cambria Math" panose="02040503050406030204" pitchFamily="18" charset="0"/>
+                          </a:rPr>
+                        </m:ctrlPr>
+                      </m:dPr>
+                      <m:e>
+                        <m:r>
+                          <a:rPr lang="de-DE" b="0" i="1" smtClean="0">
+                            <a:latin typeface="Cambria Math" panose="02040503050406030204" pitchFamily="18" charset="0"/>
+                          </a:rPr>
+                          <m:t>𝑠</m:t>
+                        </m:r>
+                      </m:e>
+                    </m:d>
+                  </m:oMath>
+                </a14:m>
+                <a:endParaRPr lang="de-DE" b="0" dirty="0"/>
+              </a:p>
+              <a:p>
+                <a:r>
+                  <a:rPr lang="de-DE" dirty="0"/>
+                  <a:t>	</a:t>
+                </a:r>
+                <a14:m>
+                  <m:oMath xmlns:m="http://schemas.openxmlformats.org/officeDocument/2006/math">
+                    <m:r>
+                      <a:rPr lang="de-DE" i="1">
+                        <a:latin typeface="Cambria Math" panose="02040503050406030204" pitchFamily="18" charset="0"/>
+                      </a:rPr>
+                      <m:t>𝑋</m:t>
+                    </m:r>
+                    <m:d>
+                      <m:dPr>
+                        <m:ctrlPr>
+                          <a:rPr lang="de-DE" i="1">
+                            <a:latin typeface="Cambria Math" panose="02040503050406030204" pitchFamily="18" charset="0"/>
+                          </a:rPr>
+                        </m:ctrlPr>
+                      </m:dPr>
+                      <m:e>
+                        <m:r>
+                          <a:rPr lang="de-DE" i="1">
+                            <a:latin typeface="Cambria Math" panose="02040503050406030204" pitchFamily="18" charset="0"/>
+                          </a:rPr>
+                          <m:t>𝑠</m:t>
+                        </m:r>
+                      </m:e>
+                    </m:d>
+                    <m:r>
+                      <a:rPr lang="de-DE" i="1">
+                        <a:latin typeface="Cambria Math" panose="02040503050406030204" pitchFamily="18" charset="0"/>
+                      </a:rPr>
+                      <m:t>=</m:t>
+                    </m:r>
+                    <m:sSup>
+                      <m:sSupPr>
+                        <m:ctrlPr>
+                          <a:rPr lang="de-DE" i="1" smtClean="0">
+                            <a:latin typeface="Cambria Math" panose="02040503050406030204" pitchFamily="18" charset="0"/>
+                          </a:rPr>
+                        </m:ctrlPr>
+                      </m:sSupPr>
+                      <m:e>
+                        <m:d>
+                          <m:dPr>
+                            <m:ctrlPr>
+                              <a:rPr lang="de-DE" i="1" smtClean="0">
+                                <a:latin typeface="Cambria Math" panose="02040503050406030204" pitchFamily="18" charset="0"/>
+                              </a:rPr>
+                            </m:ctrlPr>
+                          </m:dPr>
+                          <m:e>
+                            <m:r>
+                              <a:rPr lang="de-DE" i="1">
+                                <a:latin typeface="Cambria Math" panose="02040503050406030204" pitchFamily="18" charset="0"/>
+                              </a:rPr>
+                              <m:t>𝑠</m:t>
+                            </m:r>
+                            <m:r>
+                              <a:rPr lang="de-DE" i="1">
+                                <a:latin typeface="Cambria Math" panose="02040503050406030204" pitchFamily="18" charset="0"/>
+                                <a:ea typeface="Cambria Math" panose="02040503050406030204" pitchFamily="18" charset="0"/>
+                              </a:rPr>
+                              <m:t>𝐼</m:t>
+                            </m:r>
+                            <m:r>
+                              <a:rPr lang="de-DE" i="1">
+                                <a:latin typeface="Cambria Math" panose="02040503050406030204" pitchFamily="18" charset="0"/>
+                                <a:ea typeface="Cambria Math" panose="02040503050406030204" pitchFamily="18" charset="0"/>
+                              </a:rPr>
+                              <m:t>−</m:t>
+                            </m:r>
+                            <m:r>
+                              <a:rPr lang="de-DE" i="1">
+                                <a:latin typeface="Cambria Math" panose="02040503050406030204" pitchFamily="18" charset="0"/>
+                                <a:ea typeface="Cambria Math" panose="02040503050406030204" pitchFamily="18" charset="0"/>
+                              </a:rPr>
+                              <m:t>𝐴</m:t>
+                            </m:r>
+                          </m:e>
+                        </m:d>
+                      </m:e>
+                      <m:sup>
+                        <m:r>
+                          <a:rPr lang="de-DE" b="0" i="1" smtClean="0">
+                            <a:latin typeface="Cambria Math" panose="02040503050406030204" pitchFamily="18" charset="0"/>
+                          </a:rPr>
+                          <m:t>−1</m:t>
+                        </m:r>
+                      </m:sup>
+                    </m:sSup>
+                    <m:r>
+                      <a:rPr lang="de-DE" i="1">
+                        <a:latin typeface="Cambria Math" panose="02040503050406030204" pitchFamily="18" charset="0"/>
+                      </a:rPr>
+                      <m:t>𝐵𝑈</m:t>
+                    </m:r>
+                    <m:d>
+                      <m:dPr>
+                        <m:ctrlPr>
+                          <a:rPr lang="de-DE" i="1">
+                            <a:latin typeface="Cambria Math" panose="02040503050406030204" pitchFamily="18" charset="0"/>
+                          </a:rPr>
+                        </m:ctrlPr>
+                      </m:dPr>
+                      <m:e>
+                        <m:r>
+                          <a:rPr lang="de-DE" i="1">
+                            <a:latin typeface="Cambria Math" panose="02040503050406030204" pitchFamily="18" charset="0"/>
+                          </a:rPr>
+                          <m:t>𝑠</m:t>
+                        </m:r>
+                      </m:e>
+                    </m:d>
+                  </m:oMath>
+                </a14:m>
+                <a:endParaRPr lang="de-DE" dirty="0"/>
+              </a:p>
+              <a:p>
+                <a:r>
+                  <a:rPr lang="de-DE" b="0" dirty="0"/>
+                  <a:t>	</a:t>
+                </a:r>
+                <a14:m>
+                  <m:oMath xmlns:m="http://schemas.openxmlformats.org/officeDocument/2006/math">
+                    <m:r>
+                      <a:rPr lang="de-DE" b="0" i="1" smtClean="0">
+                        <a:latin typeface="Cambria Math" panose="02040503050406030204" pitchFamily="18" charset="0"/>
+                      </a:rPr>
+                      <m:t>𝑌</m:t>
+                    </m:r>
+                    <m:d>
+                      <m:dPr>
+                        <m:ctrlPr>
+                          <a:rPr lang="de-DE" b="0" i="1" smtClean="0">
+                            <a:latin typeface="Cambria Math" panose="02040503050406030204" pitchFamily="18" charset="0"/>
+                          </a:rPr>
+                        </m:ctrlPr>
+                      </m:dPr>
+                      <m:e>
+                        <m:r>
+                          <a:rPr lang="de-DE" b="0" i="1" smtClean="0">
+                            <a:latin typeface="Cambria Math" panose="02040503050406030204" pitchFamily="18" charset="0"/>
+                          </a:rPr>
+                          <m:t>𝑠</m:t>
+                        </m:r>
+                      </m:e>
+                    </m:d>
+                    <m:r>
+                      <a:rPr lang="de-DE" b="0" i="1" smtClean="0">
+                        <a:latin typeface="Cambria Math" panose="02040503050406030204" pitchFamily="18" charset="0"/>
+                      </a:rPr>
+                      <m:t>=</m:t>
+                    </m:r>
+                    <m:r>
+                      <a:rPr lang="de-DE" b="0" i="1" smtClean="0">
+                        <a:latin typeface="Cambria Math" panose="02040503050406030204" pitchFamily="18" charset="0"/>
+                      </a:rPr>
+                      <m:t>𝐶𝑋</m:t>
+                    </m:r>
+                    <m:d>
+                      <m:dPr>
+                        <m:ctrlPr>
+                          <a:rPr lang="de-DE" b="0" i="1" smtClean="0">
+                            <a:latin typeface="Cambria Math" panose="02040503050406030204" pitchFamily="18" charset="0"/>
+                          </a:rPr>
+                        </m:ctrlPr>
+                      </m:dPr>
+                      <m:e>
+                        <m:r>
+                          <a:rPr lang="de-DE" b="0" i="1" smtClean="0">
+                            <a:latin typeface="Cambria Math" panose="02040503050406030204" pitchFamily="18" charset="0"/>
+                          </a:rPr>
+                          <m:t>𝑠</m:t>
+                        </m:r>
+                      </m:e>
+                    </m:d>
+                    <m:r>
+                      <a:rPr lang="de-DE" b="0" i="1" smtClean="0">
+                        <a:latin typeface="Cambria Math" panose="02040503050406030204" pitchFamily="18" charset="0"/>
+                      </a:rPr>
+                      <m:t>+</m:t>
+                    </m:r>
+                    <m:r>
+                      <a:rPr lang="de-DE" b="0" i="1" smtClean="0">
+                        <a:latin typeface="Cambria Math" panose="02040503050406030204" pitchFamily="18" charset="0"/>
+                      </a:rPr>
+                      <m:t>𝐷𝑈</m:t>
+                    </m:r>
+                    <m:d>
+                      <m:dPr>
+                        <m:ctrlPr>
+                          <a:rPr lang="de-DE" b="0" i="1" smtClean="0">
+                            <a:latin typeface="Cambria Math" panose="02040503050406030204" pitchFamily="18" charset="0"/>
+                          </a:rPr>
+                        </m:ctrlPr>
+                      </m:dPr>
+                      <m:e>
+                        <m:r>
+                          <a:rPr lang="de-DE" b="0" i="1" smtClean="0">
+                            <a:latin typeface="Cambria Math" panose="02040503050406030204" pitchFamily="18" charset="0"/>
+                          </a:rPr>
+                          <m:t>𝑠</m:t>
+                        </m:r>
+                      </m:e>
+                    </m:d>
+                  </m:oMath>
+                </a14:m>
+                <a:endParaRPr lang="de-DE" b="0" dirty="0"/>
+              </a:p>
+              <a:p>
+                <a:r>
+                  <a:rPr lang="de-DE" b="0" dirty="0"/>
+                  <a:t>	</a:t>
+                </a:r>
+                <a14:m>
+                  <m:oMath xmlns:m="http://schemas.openxmlformats.org/officeDocument/2006/math">
+                    <m:r>
+                      <a:rPr lang="de-DE" b="0" i="1" smtClean="0">
+                        <a:latin typeface="Cambria Math" panose="02040503050406030204" pitchFamily="18" charset="0"/>
+                      </a:rPr>
+                      <m:t>𝐺</m:t>
+                    </m:r>
+                    <m:d>
+                      <m:dPr>
+                        <m:ctrlPr>
+                          <a:rPr lang="de-DE" b="0" i="1" smtClean="0">
+                            <a:latin typeface="Cambria Math" panose="02040503050406030204" pitchFamily="18" charset="0"/>
+                          </a:rPr>
+                        </m:ctrlPr>
+                      </m:dPr>
+                      <m:e>
+                        <m:r>
+                          <a:rPr lang="de-DE" b="0" i="1" smtClean="0">
+                            <a:latin typeface="Cambria Math" panose="02040503050406030204" pitchFamily="18" charset="0"/>
+                          </a:rPr>
+                          <m:t>𝑠</m:t>
+                        </m:r>
+                      </m:e>
+                    </m:d>
+                    <m:r>
+                      <a:rPr lang="de-DE" b="0" i="1" smtClean="0">
+                        <a:latin typeface="Cambria Math" panose="02040503050406030204" pitchFamily="18" charset="0"/>
+                      </a:rPr>
+                      <m:t>=</m:t>
+                    </m:r>
+                    <m:f>
+                      <m:fPr>
+                        <m:ctrlPr>
+                          <a:rPr lang="de-DE" b="0" i="1" smtClean="0">
+                            <a:latin typeface="Cambria Math" panose="02040503050406030204" pitchFamily="18" charset="0"/>
+                          </a:rPr>
+                        </m:ctrlPr>
+                      </m:fPr>
+                      <m:num>
+                        <m:r>
+                          <a:rPr lang="de-DE" b="0" i="1" smtClean="0">
+                            <a:latin typeface="Cambria Math" panose="02040503050406030204" pitchFamily="18" charset="0"/>
+                          </a:rPr>
+                          <m:t>𝑌</m:t>
+                        </m:r>
+                        <m:r>
+                          <a:rPr lang="de-DE" b="0" i="1" smtClean="0">
+                            <a:latin typeface="Cambria Math" panose="02040503050406030204" pitchFamily="18" charset="0"/>
+                          </a:rPr>
+                          <m:t>(</m:t>
+                        </m:r>
+                        <m:r>
+                          <a:rPr lang="de-DE" b="0" i="1" smtClean="0">
+                            <a:latin typeface="Cambria Math" panose="02040503050406030204" pitchFamily="18" charset="0"/>
+                          </a:rPr>
+                          <m:t>𝑠</m:t>
+                        </m:r>
+                        <m:r>
+                          <a:rPr lang="de-DE" b="0" i="1" smtClean="0">
+                            <a:latin typeface="Cambria Math" panose="02040503050406030204" pitchFamily="18" charset="0"/>
+                          </a:rPr>
+                          <m:t>)</m:t>
+                        </m:r>
+                      </m:num>
+                      <m:den>
+                        <m:r>
+                          <a:rPr lang="de-DE" b="0" i="1" smtClean="0">
+                            <a:latin typeface="Cambria Math" panose="02040503050406030204" pitchFamily="18" charset="0"/>
+                          </a:rPr>
+                          <m:t>𝑈</m:t>
+                        </m:r>
+                        <m:r>
+                          <a:rPr lang="de-DE" b="0" i="1" smtClean="0">
+                            <a:latin typeface="Cambria Math" panose="02040503050406030204" pitchFamily="18" charset="0"/>
+                          </a:rPr>
+                          <m:t>(</m:t>
+                        </m:r>
+                        <m:r>
+                          <a:rPr lang="de-DE" b="0" i="1" smtClean="0">
+                            <a:latin typeface="Cambria Math" panose="02040503050406030204" pitchFamily="18" charset="0"/>
+                          </a:rPr>
+                          <m:t>𝑠</m:t>
+                        </m:r>
+                        <m:r>
+                          <a:rPr lang="de-DE" b="0" i="1" smtClean="0">
+                            <a:latin typeface="Cambria Math" panose="02040503050406030204" pitchFamily="18" charset="0"/>
+                          </a:rPr>
+                          <m:t>)</m:t>
+                        </m:r>
+                      </m:den>
+                    </m:f>
+                    <m:r>
+                      <a:rPr lang="de-DE" b="0" i="1" smtClean="0">
+                        <a:latin typeface="Cambria Math" panose="02040503050406030204" pitchFamily="18" charset="0"/>
+                      </a:rPr>
+                      <m:t>=</m:t>
+                    </m:r>
+                    <m:r>
+                      <a:rPr lang="de-DE" b="0" i="1" smtClean="0">
+                        <a:latin typeface="Cambria Math" panose="02040503050406030204" pitchFamily="18" charset="0"/>
+                      </a:rPr>
+                      <m:t>𝐶</m:t>
+                    </m:r>
+                    <m:sSup>
+                      <m:sSupPr>
+                        <m:ctrlPr>
+                          <a:rPr lang="de-DE" i="1">
+                            <a:latin typeface="Cambria Math" panose="02040503050406030204" pitchFamily="18" charset="0"/>
+                          </a:rPr>
+                        </m:ctrlPr>
+                      </m:sSupPr>
+                      <m:e>
+                        <m:d>
+                          <m:dPr>
+                            <m:ctrlPr>
+                              <a:rPr lang="de-DE" i="1">
+                                <a:latin typeface="Cambria Math" panose="02040503050406030204" pitchFamily="18" charset="0"/>
+                              </a:rPr>
+                            </m:ctrlPr>
+                          </m:dPr>
+                          <m:e>
+                            <m:r>
+                              <a:rPr lang="de-DE" i="1">
+                                <a:latin typeface="Cambria Math" panose="02040503050406030204" pitchFamily="18" charset="0"/>
+                              </a:rPr>
+                              <m:t>𝑠</m:t>
+                            </m:r>
+                            <m:r>
+                              <a:rPr lang="de-DE" i="1">
+                                <a:latin typeface="Cambria Math" panose="02040503050406030204" pitchFamily="18" charset="0"/>
+                                <a:ea typeface="Cambria Math" panose="02040503050406030204" pitchFamily="18" charset="0"/>
+                              </a:rPr>
+                              <m:t>𝐼</m:t>
+                            </m:r>
+                            <m:r>
+                              <a:rPr lang="de-DE" i="1">
+                                <a:latin typeface="Cambria Math" panose="02040503050406030204" pitchFamily="18" charset="0"/>
+                                <a:ea typeface="Cambria Math" panose="02040503050406030204" pitchFamily="18" charset="0"/>
+                              </a:rPr>
+                              <m:t>−</m:t>
+                            </m:r>
+                            <m:r>
+                              <a:rPr lang="de-DE" i="1">
+                                <a:latin typeface="Cambria Math" panose="02040503050406030204" pitchFamily="18" charset="0"/>
+                                <a:ea typeface="Cambria Math" panose="02040503050406030204" pitchFamily="18" charset="0"/>
+                              </a:rPr>
+                              <m:t>𝐴</m:t>
+                            </m:r>
+                          </m:e>
+                        </m:d>
+                      </m:e>
+                      <m:sup>
+                        <m:r>
+                          <a:rPr lang="de-DE" i="1">
+                            <a:latin typeface="Cambria Math" panose="02040503050406030204" pitchFamily="18" charset="0"/>
+                          </a:rPr>
+                          <m:t>−1</m:t>
+                        </m:r>
+                      </m:sup>
+                    </m:sSup>
+                    <m:r>
+                      <a:rPr lang="de-DE" b="0" i="1" smtClean="0">
+                        <a:latin typeface="Cambria Math" panose="02040503050406030204" pitchFamily="18" charset="0"/>
+                      </a:rPr>
+                      <m:t>𝐵</m:t>
+                    </m:r>
+                    <m:r>
+                      <a:rPr lang="de-DE" b="0" i="1" smtClean="0">
+                        <a:latin typeface="Cambria Math" panose="02040503050406030204" pitchFamily="18" charset="0"/>
+                      </a:rPr>
+                      <m:t>+</m:t>
+                    </m:r>
+                    <m:r>
+                      <a:rPr lang="de-DE" b="0" i="1" smtClean="0">
+                        <a:latin typeface="Cambria Math" panose="02040503050406030204" pitchFamily="18" charset="0"/>
+                      </a:rPr>
+                      <m:t>𝐷</m:t>
+                    </m:r>
+                  </m:oMath>
+                </a14:m>
+                <a:endParaRPr lang="de-DE" dirty="0"/>
+              </a:p>
+              <a:p>
+                <a:r>
+                  <a:rPr lang="de-DE" dirty="0">
+                    <a:sym typeface="Wingdings" pitchFamily="2" charset="2"/>
+                  </a:rPr>
+                  <a:t>	 </a:t>
+                </a:r>
+                <a:r>
+                  <a:rPr lang="de-DE" dirty="0" err="1">
+                    <a:sym typeface="Wingdings" pitchFamily="2" charset="2"/>
+                  </a:rPr>
+                  <a:t>poles</a:t>
+                </a:r>
+                <a:r>
+                  <a:rPr lang="de-DE" dirty="0">
+                    <a:sym typeface="Wingdings" pitchFamily="2" charset="2"/>
+                  </a:rPr>
+                  <a:t> </a:t>
+                </a:r>
+                <a14:m>
+                  <m:oMath xmlns:m="http://schemas.openxmlformats.org/officeDocument/2006/math">
+                    <m:r>
+                      <a:rPr lang="de-DE" i="1">
+                        <a:latin typeface="Cambria Math" panose="02040503050406030204" pitchFamily="18" charset="0"/>
+                      </a:rPr>
+                      <m:t>𝑠</m:t>
+                    </m:r>
+                  </m:oMath>
+                </a14:m>
+                <a:r>
+                  <a:rPr lang="de-DE" dirty="0">
+                    <a:sym typeface="Wingdings" pitchFamily="2" charset="2"/>
+                  </a:rPr>
+                  <a:t>: </a:t>
+                </a:r>
+                <a14:m>
+                  <m:oMath xmlns:m="http://schemas.openxmlformats.org/officeDocument/2006/math">
+                    <m:func>
+                      <m:funcPr>
+                        <m:ctrlPr>
+                          <a:rPr lang="de-DE" i="1">
+                            <a:latin typeface="Cambria Math" panose="02040503050406030204" pitchFamily="18" charset="0"/>
+                          </a:rPr>
+                        </m:ctrlPr>
+                      </m:funcPr>
+                      <m:fName>
+                        <m:r>
+                          <m:rPr>
+                            <m:sty m:val="p"/>
+                          </m:rPr>
+                          <a:rPr lang="de-DE">
+                            <a:latin typeface="Cambria Math" panose="02040503050406030204" pitchFamily="18" charset="0"/>
+                          </a:rPr>
+                          <m:t>det</m:t>
+                        </m:r>
+                      </m:fName>
+                      <m:e>
+                        <m:d>
+                          <m:dPr>
+                            <m:ctrlPr>
+                              <a:rPr lang="de-DE" i="1">
+                                <a:latin typeface="Cambria Math" panose="02040503050406030204" pitchFamily="18" charset="0"/>
+                              </a:rPr>
+                            </m:ctrlPr>
+                          </m:dPr>
+                          <m:e>
+                            <m:r>
+                              <a:rPr lang="de-DE" i="1">
+                                <a:latin typeface="Cambria Math" panose="02040503050406030204" pitchFamily="18" charset="0"/>
+                              </a:rPr>
+                              <m:t>𝑠</m:t>
+                            </m:r>
+                            <m:r>
+                              <a:rPr lang="de-DE" i="1">
+                                <a:latin typeface="Cambria Math" panose="02040503050406030204" pitchFamily="18" charset="0"/>
+                                <a:ea typeface="Cambria Math" panose="02040503050406030204" pitchFamily="18" charset="0"/>
+                              </a:rPr>
+                              <m:t>𝐼</m:t>
+                            </m:r>
+                            <m:r>
+                              <a:rPr lang="de-DE" i="1">
+                                <a:latin typeface="Cambria Math" panose="02040503050406030204" pitchFamily="18" charset="0"/>
+                                <a:ea typeface="Cambria Math" panose="02040503050406030204" pitchFamily="18" charset="0"/>
+                              </a:rPr>
+                              <m:t>−</m:t>
+                            </m:r>
+                            <m:r>
+                              <a:rPr lang="de-DE" i="1">
+                                <a:latin typeface="Cambria Math" panose="02040503050406030204" pitchFamily="18" charset="0"/>
+                                <a:ea typeface="Cambria Math" panose="02040503050406030204" pitchFamily="18" charset="0"/>
+                              </a:rPr>
+                              <m:t>𝐴</m:t>
+                            </m:r>
+                          </m:e>
+                        </m:d>
+                        <m:r>
+                          <a:rPr lang="de-DE" i="1">
+                            <a:latin typeface="Cambria Math" panose="02040503050406030204" pitchFamily="18" charset="0"/>
+                          </a:rPr>
+                          <m:t>=0</m:t>
+                        </m:r>
+                      </m:e>
+                    </m:func>
+                  </m:oMath>
+                </a14:m>
+                <a:endParaRPr lang="de-DE" dirty="0"/>
+              </a:p>
+            </p:txBody>
+          </p:sp>
+        </mc:Choice>
+        <mc:Fallback xmlns="">
+          <p:sp>
+            <p:nvSpPr>
+              <p:cNvPr id="9" name="Textfeld 8">
+                <a:extLst>
+                  <a:ext uri="{FF2B5EF4-FFF2-40B4-BE49-F238E27FC236}">
+                    <a16:creationId xmlns:a16="http://schemas.microsoft.com/office/drawing/2014/main" id="{63B33E71-004B-4058-6B9C-D9A96BE4801A}"/>
+                  </a:ext>
+                </a:extLst>
+              </p:cNvPr>
+              <p:cNvSpPr txBox="1">
+                <a:spLocks noRot="1" noChangeAspect="1" noMove="1" noResize="1" noEditPoints="1" noAdjustHandles="1" noChangeArrowheads="1" noChangeShapeType="1" noTextEdit="1"/>
+              </p:cNvSpPr>
+              <p:nvPr/>
+            </p:nvSpPr>
+            <p:spPr>
+              <a:xfrm>
+                <a:off x="7772400" y="136527"/>
+                <a:ext cx="4303642" cy="1826206"/>
+              </a:xfrm>
+              <a:prstGeom prst="rect">
+                <a:avLst/>
+              </a:prstGeom>
+              <a:blipFill>
+                <a:blip r:embed="rId4"/>
+                <a:stretch>
+                  <a:fillRect t="-4110" b="-6849"/>
+                </a:stretch>
+              </a:blipFill>
+              <a:ln>
+                <a:solidFill>
+                  <a:schemeClr val="tx1"/>
+                </a:solidFill>
+              </a:ln>
+            </p:spPr>
+            <p:txBody>
+              <a:bodyPr/>
+              <a:lstStyle/>
+              <a:p>
+                <a:r>
+                  <a:rPr lang="de-DE">
+                    <a:noFill/>
+                  </a:rPr>
+                  <a:t> </a:t>
+                </a:r>
+              </a:p>
+            </p:txBody>
+          </p:sp>
+        </mc:Fallback>
+      </mc:AlternateContent>
     </p:spTree>
     <p:extLst>
       <p:ext uri="{BB962C8B-B14F-4D97-AF65-F5344CB8AC3E}">
@@ -10037,9 +11652,15 @@
                     <m:r>
                       <a:rPr lang="de-DE" b="0" i="1" smtClean="0">
                         <a:latin typeface="Cambria Math" panose="02040503050406030204" pitchFamily="18" charset="0"/>
+                      </a:rPr>
+                      <m:t>&gt;</m:t>
+                    </m:r>
+                    <m:r>
+                      <a:rPr lang="de-DE" b="0" i="1" smtClean="0">
+                        <a:latin typeface="Cambria Math" panose="02040503050406030204" pitchFamily="18" charset="0"/>
                         <a:ea typeface="Cambria Math" panose="02040503050406030204" pitchFamily="18" charset="0"/>
                       </a:rPr>
-                      <m:t>≥0</m:t>
+                      <m:t>0</m:t>
                     </m:r>
                   </m:oMath>
                 </a14:m>
@@ -10344,8 +11965,8 @@
           </a:p>
         </p:txBody>
       </p:sp>
-      <mc:AlternateContent xmlns:mc="http://schemas.openxmlformats.org/markup-compatibility/2006">
-        <mc:Choice xmlns:a14="http://schemas.microsoft.com/office/drawing/2010/main" Requires="a14">
+      <mc:AlternateContent xmlns:mc="http://schemas.openxmlformats.org/markup-compatibility/2006" xmlns:a14="http://schemas.microsoft.com/office/drawing/2010/main">
+        <mc:Choice Requires="a14">
           <p:sp>
             <p:nvSpPr>
               <p:cNvPr id="6" name="Textfeld 5">
@@ -10465,7 +12086,7 @@
             </p:txBody>
           </p:sp>
         </mc:Choice>
-        <mc:Fallback>
+        <mc:Fallback xmlns="">
           <p:sp>
             <p:nvSpPr>
               <p:cNvPr id="6" name="Textfeld 5">
@@ -10524,7 +12145,7 @@
         </p:nvSpPr>
         <p:spPr>
           <a:xfrm>
-            <a:off x="6050032" y="3160644"/>
+            <a:off x="6050032" y="3150812"/>
             <a:ext cx="332134" cy="651807"/>
           </a:xfrm>
           <a:prstGeom prst="rightBrace">
@@ -10692,8 +12313,8 @@
           </a:p>
         </p:txBody>
       </p:sp>
-      <mc:AlternateContent xmlns:mc="http://schemas.openxmlformats.org/markup-compatibility/2006">
-        <mc:Choice xmlns:a14="http://schemas.microsoft.com/office/drawing/2010/main" Requires="a14">
+      <mc:AlternateContent xmlns:mc="http://schemas.openxmlformats.org/markup-compatibility/2006" xmlns:a14="http://schemas.microsoft.com/office/drawing/2010/main">
+        <mc:Choice Requires="a14">
           <p:sp>
             <p:nvSpPr>
               <p:cNvPr id="3" name="Inhaltsplatzhalter 2">
@@ -11204,7 +12825,7 @@
             </p:txBody>
           </p:sp>
         </mc:Choice>
-        <mc:Fallback>
+        <mc:Fallback xmlns="">
           <p:sp>
             <p:nvSpPr>
               <p:cNvPr id="3" name="Inhaltsplatzhalter 2">
@@ -11273,42 +12894,6 @@
           </a:p>
         </p:txBody>
       </p:sp>
-      <p:pic>
-        <p:nvPicPr>
-          <p:cNvPr id="6" name="Grafik 5">
-            <a:extLst>
-              <a:ext uri="{FF2B5EF4-FFF2-40B4-BE49-F238E27FC236}">
-                <a16:creationId xmlns:a16="http://schemas.microsoft.com/office/drawing/2014/main" id="{DD75A131-299D-F3EB-CC7F-D4B80546472D}"/>
-              </a:ext>
-            </a:extLst>
-          </p:cNvPr>
-          <p:cNvPicPr>
-            <a:picLocks noChangeAspect="1"/>
-          </p:cNvPicPr>
-          <p:nvPr/>
-        </p:nvPicPr>
-        <p:blipFill>
-          <a:blip r:embed="rId3">
-            <a:extLst>
-              <a:ext uri="{28A0092B-C50C-407E-A947-70E740481C1C}">
-                <a14:useLocalDpi xmlns:a14="http://schemas.microsoft.com/office/drawing/2010/main" val="0"/>
-              </a:ext>
-            </a:extLst>
-          </a:blip>
-          <a:stretch>
-            <a:fillRect/>
-          </a:stretch>
-        </p:blipFill>
-        <p:spPr>
-          <a:xfrm>
-            <a:off x="6096000" y="2646737"/>
-            <a:ext cx="5863213" cy="2033251"/>
-          </a:xfrm>
-          <a:prstGeom prst="rect">
-            <a:avLst/>
-          </a:prstGeom>
-        </p:spPr>
-      </p:pic>
       <p:sp>
         <p:nvSpPr>
           <p:cNvPr id="7" name="Textfeld 6">
@@ -11324,7 +12909,7 @@
         <p:spPr>
           <a:xfrm>
             <a:off x="4281280" y="2734670"/>
-            <a:ext cx="1814720" cy="400110"/>
+            <a:ext cx="2099642" cy="461665"/>
           </a:xfrm>
           <a:prstGeom prst="rect">
             <a:avLst/>
@@ -11343,18 +12928,18 @@
           <a:lstStyle/>
           <a:p>
             <a:r>
-              <a:rPr lang="de-DE" sz="2000" dirty="0" err="1"/>
+              <a:rPr lang="de-DE" sz="2400" dirty="0" err="1"/>
               <a:t>observer</a:t>
             </a:r>
             <a:r>
-              <a:rPr lang="de-DE" sz="2000" dirty="0"/>
+              <a:rPr lang="de-DE" sz="2400" dirty="0"/>
               <a:t> </a:t>
             </a:r>
             <a:r>
-              <a:rPr lang="de-DE" sz="2000" dirty="0" err="1"/>
+              <a:rPr lang="de-DE" sz="2400" dirty="0" err="1"/>
               <a:t>gains</a:t>
             </a:r>
-            <a:endParaRPr lang="de-DE" sz="2000" dirty="0"/>
+            <a:endParaRPr lang="de-DE" sz="2400" dirty="0"/>
           </a:p>
         </p:txBody>
       </p:sp>
@@ -11374,6 +12959,419 @@
           <a:xfrm flipH="1">
             <a:off x="4084983" y="2922104"/>
             <a:ext cx="178904" cy="407505"/>
+          </a:xfrm>
+          <a:prstGeom prst="straightConnector1">
+            <a:avLst/>
+          </a:prstGeom>
+          <a:ln>
+            <a:tailEnd type="triangle"/>
+          </a:ln>
+        </p:spPr>
+        <p:style>
+          <a:lnRef idx="2">
+            <a:schemeClr val="accent1"/>
+          </a:lnRef>
+          <a:fillRef idx="0">
+            <a:schemeClr val="accent1"/>
+          </a:fillRef>
+          <a:effectRef idx="1">
+            <a:schemeClr val="accent1"/>
+          </a:effectRef>
+          <a:fontRef idx="minor">
+            <a:schemeClr val="tx1"/>
+          </a:fontRef>
+        </p:style>
+      </p:cxnSp>
+      <p:sp>
+        <p:nvSpPr>
+          <p:cNvPr id="5" name="Geschweifte Klammer rechts 4">
+            <a:extLst>
+              <a:ext uri="{FF2B5EF4-FFF2-40B4-BE49-F238E27FC236}">
+                <a16:creationId xmlns:a16="http://schemas.microsoft.com/office/drawing/2014/main" id="{683D3E94-2040-383B-F4C0-1439CD48EC26}"/>
+              </a:ext>
+            </a:extLst>
+          </p:cNvPr>
+          <p:cNvSpPr/>
+          <p:nvPr/>
+        </p:nvSpPr>
+        <p:spPr>
+          <a:xfrm rot="5400000">
+            <a:off x="4609272" y="3308262"/>
+            <a:ext cx="223630" cy="1053548"/>
+          </a:xfrm>
+          <a:prstGeom prst="rightBrace">
+            <a:avLst/>
+          </a:prstGeom>
+        </p:spPr>
+        <p:style>
+          <a:lnRef idx="2">
+            <a:schemeClr val="accent1"/>
+          </a:lnRef>
+          <a:fillRef idx="0">
+            <a:schemeClr val="accent1"/>
+          </a:fillRef>
+          <a:effectRef idx="1">
+            <a:schemeClr val="accent1"/>
+          </a:effectRef>
+          <a:fontRef idx="minor">
+            <a:schemeClr val="tx1"/>
+          </a:fontRef>
+        </p:style>
+        <p:txBody>
+          <a:bodyPr rtlCol="0" anchor="ctr"/>
+          <a:lstStyle/>
+          <a:p>
+            <a:pPr algn="ctr"/>
+            <a:endParaRPr lang="de-DE"/>
+          </a:p>
+        </p:txBody>
+      </p:sp>
+      <mc:AlternateContent xmlns:mc="http://schemas.openxmlformats.org/markup-compatibility/2006" xmlns:a14="http://schemas.microsoft.com/office/drawing/2010/main">
+        <mc:Choice Requires="a14">
+          <p:sp>
+            <p:nvSpPr>
+              <p:cNvPr id="8" name="Textfeld 7">
+                <a:extLst>
+                  <a:ext uri="{FF2B5EF4-FFF2-40B4-BE49-F238E27FC236}">
+                    <a16:creationId xmlns:a16="http://schemas.microsoft.com/office/drawing/2014/main" id="{32A56BE6-F9F7-CB89-3454-D39B73FD40F7}"/>
+                  </a:ext>
+                </a:extLst>
+              </p:cNvPr>
+              <p:cNvSpPr txBox="1"/>
+              <p:nvPr/>
+            </p:nvSpPr>
+            <p:spPr>
+              <a:xfrm>
+                <a:off x="7289446" y="3531352"/>
+                <a:ext cx="4591128" cy="1569660"/>
+              </a:xfrm>
+              <a:prstGeom prst="rect">
+                <a:avLst/>
+              </a:prstGeom>
+              <a:noFill/>
+            </p:spPr>
+            <p:txBody>
+              <a:bodyPr wrap="square" rtlCol="0">
+                <a:spAutoFit/>
+              </a:bodyPr>
+              <a:lstStyle/>
+              <a:p>
+                <a:r>
+                  <a:rPr lang="de-DE" sz="2400" dirty="0"/>
+                  <a:t>Output </a:t>
+                </a:r>
+                <a:r>
+                  <a:rPr lang="de-DE" sz="2400" dirty="0" err="1"/>
+                  <a:t>error</a:t>
+                </a:r>
+                <a:r>
+                  <a:rPr lang="de-DE" sz="2400" dirty="0"/>
+                  <a:t>: </a:t>
+                </a:r>
+                <a:r>
+                  <a:rPr lang="de-DE" sz="2400" dirty="0" err="1"/>
+                  <a:t>drives</a:t>
+                </a:r>
+                <a:r>
+                  <a:rPr lang="de-DE" sz="2400" dirty="0"/>
+                  <a:t> </a:t>
+                </a:r>
+                <a14:m>
+                  <m:oMath xmlns:m="http://schemas.openxmlformats.org/officeDocument/2006/math">
+                    <m:acc>
+                      <m:accPr>
+                        <m:chr m:val="̂"/>
+                        <m:ctrlPr>
+                          <a:rPr lang="de-DE" sz="2400" i="1">
+                            <a:latin typeface="Cambria Math" panose="02040503050406030204" pitchFamily="18" charset="0"/>
+                          </a:rPr>
+                        </m:ctrlPr>
+                      </m:accPr>
+                      <m:e>
+                        <m:r>
+                          <a:rPr lang="de-DE" sz="2400" i="1">
+                            <a:latin typeface="Cambria Math" panose="02040503050406030204" pitchFamily="18" charset="0"/>
+                          </a:rPr>
+                          <m:t>𝑥</m:t>
+                        </m:r>
+                      </m:e>
+                    </m:acc>
+                    <m:d>
+                      <m:dPr>
+                        <m:ctrlPr>
+                          <a:rPr lang="de-DE" sz="2400" i="1">
+                            <a:latin typeface="Cambria Math" panose="02040503050406030204" pitchFamily="18" charset="0"/>
+                          </a:rPr>
+                        </m:ctrlPr>
+                      </m:dPr>
+                      <m:e>
+                        <m:r>
+                          <a:rPr lang="de-DE" sz="2400" i="1">
+                            <a:latin typeface="Cambria Math" panose="02040503050406030204" pitchFamily="18" charset="0"/>
+                          </a:rPr>
+                          <m:t>𝑡</m:t>
+                        </m:r>
+                      </m:e>
+                    </m:d>
+                    <m:r>
+                      <a:rPr lang="de-DE" sz="2400" i="1" smtClean="0">
+                        <a:latin typeface="Cambria Math" panose="02040503050406030204" pitchFamily="18" charset="0"/>
+                        <a:ea typeface="Cambria Math" panose="02040503050406030204" pitchFamily="18" charset="0"/>
+                      </a:rPr>
+                      <m:t>→</m:t>
+                    </m:r>
+                    <m:r>
+                      <a:rPr lang="de-DE" sz="2400" i="1">
+                        <a:latin typeface="Cambria Math" panose="02040503050406030204" pitchFamily="18" charset="0"/>
+                        <a:ea typeface="Cambria Math" panose="02040503050406030204" pitchFamily="18" charset="0"/>
+                      </a:rPr>
+                      <m:t>𝑥</m:t>
+                    </m:r>
+                    <m:r>
+                      <a:rPr lang="de-DE" sz="2400" i="1">
+                        <a:latin typeface="Cambria Math" panose="02040503050406030204" pitchFamily="18" charset="0"/>
+                        <a:ea typeface="Cambria Math" panose="02040503050406030204" pitchFamily="18" charset="0"/>
+                      </a:rPr>
+                      <m:t>(</m:t>
+                    </m:r>
+                    <m:r>
+                      <a:rPr lang="de-DE" sz="2400" i="1">
+                        <a:latin typeface="Cambria Math" panose="02040503050406030204" pitchFamily="18" charset="0"/>
+                        <a:ea typeface="Cambria Math" panose="02040503050406030204" pitchFamily="18" charset="0"/>
+                      </a:rPr>
+                      <m:t>𝑡</m:t>
+                    </m:r>
+                    <m:r>
+                      <a:rPr lang="de-DE" sz="2400" i="1">
+                        <a:latin typeface="Cambria Math" panose="02040503050406030204" pitchFamily="18" charset="0"/>
+                        <a:ea typeface="Cambria Math" panose="02040503050406030204" pitchFamily="18" charset="0"/>
+                      </a:rPr>
+                      <m:t>)</m:t>
+                    </m:r>
+                  </m:oMath>
+                </a14:m>
+                <a:endParaRPr lang="de-DE" sz="2400" dirty="0"/>
+              </a:p>
+              <a:p>
+                <a:r>
+                  <a:rPr lang="de-DE" sz="2400" dirty="0" err="1"/>
+                  <a:t>Estimation</a:t>
+                </a:r>
+                <a:r>
+                  <a:rPr lang="de-DE" sz="2400" dirty="0"/>
+                  <a:t> </a:t>
+                </a:r>
+                <a:r>
+                  <a:rPr lang="de-DE" sz="2400" dirty="0" err="1"/>
+                  <a:t>error</a:t>
+                </a:r>
+                <a:r>
+                  <a:rPr lang="de-DE" sz="2400" dirty="0"/>
+                  <a:t> </a:t>
+                </a:r>
+                <a14:m>
+                  <m:oMath xmlns:m="http://schemas.openxmlformats.org/officeDocument/2006/math">
+                    <m:r>
+                      <a:rPr lang="de-DE" sz="2400" i="1">
+                        <a:latin typeface="Cambria Math" panose="02040503050406030204" pitchFamily="18" charset="0"/>
+                      </a:rPr>
+                      <m:t>𝑒</m:t>
+                    </m:r>
+                    <m:r>
+                      <a:rPr lang="de-DE" sz="2400" b="0" i="1" smtClean="0">
+                        <a:latin typeface="Cambria Math" panose="02040503050406030204" pitchFamily="18" charset="0"/>
+                      </a:rPr>
+                      <m:t>=</m:t>
+                    </m:r>
+                    <m:r>
+                      <a:rPr lang="de-DE" sz="2400" b="0" i="1" smtClean="0">
+                        <a:latin typeface="Cambria Math" panose="02040503050406030204" pitchFamily="18" charset="0"/>
+                      </a:rPr>
+                      <m:t>𝑥</m:t>
+                    </m:r>
+                    <m:r>
+                      <a:rPr lang="de-DE" sz="2400" b="0" i="1" smtClean="0">
+                        <a:latin typeface="Cambria Math" panose="02040503050406030204" pitchFamily="18" charset="0"/>
+                      </a:rPr>
+                      <m:t>−</m:t>
+                    </m:r>
+                    <m:acc>
+                      <m:accPr>
+                        <m:chr m:val="̂"/>
+                        <m:ctrlPr>
+                          <a:rPr lang="de-DE" sz="2400" i="1">
+                            <a:latin typeface="Cambria Math" panose="02040503050406030204" pitchFamily="18" charset="0"/>
+                          </a:rPr>
+                        </m:ctrlPr>
+                      </m:accPr>
+                      <m:e>
+                        <m:r>
+                          <a:rPr lang="de-DE" sz="2400" i="1">
+                            <a:latin typeface="Cambria Math" panose="02040503050406030204" pitchFamily="18" charset="0"/>
+                          </a:rPr>
+                          <m:t>𝑥</m:t>
+                        </m:r>
+                      </m:e>
+                    </m:acc>
+                  </m:oMath>
+                </a14:m>
+                <a:endParaRPr lang="de-DE" sz="2400" i="1" dirty="0">
+                  <a:latin typeface="Cambria Math" panose="02040503050406030204" pitchFamily="18" charset="0"/>
+                </a:endParaRPr>
+              </a:p>
+              <a:p>
+                <a:r>
+                  <a:rPr lang="de-DE" sz="2400" dirty="0">
+                    <a:sym typeface="Wingdings" pitchFamily="2" charset="2"/>
+                  </a:rPr>
+                  <a:t> </a:t>
+                </a:r>
+                <a14:m>
+                  <m:oMath xmlns:m="http://schemas.openxmlformats.org/officeDocument/2006/math">
+                    <m:acc>
+                      <m:accPr>
+                        <m:chr m:val="̇"/>
+                        <m:ctrlPr>
+                          <a:rPr lang="de-DE" sz="2400" i="1">
+                            <a:latin typeface="Cambria Math" panose="02040503050406030204" pitchFamily="18" charset="0"/>
+                          </a:rPr>
+                        </m:ctrlPr>
+                      </m:accPr>
+                      <m:e>
+                        <m:r>
+                          <a:rPr lang="de-DE" sz="2400" b="0" i="1" smtClean="0">
+                            <a:latin typeface="Cambria Math" panose="02040503050406030204" pitchFamily="18" charset="0"/>
+                          </a:rPr>
+                          <m:t>𝑒</m:t>
+                        </m:r>
+                      </m:e>
+                    </m:acc>
+                    <m:r>
+                      <a:rPr lang="de-DE" sz="2400" i="1">
+                        <a:latin typeface="Cambria Math" panose="02040503050406030204" pitchFamily="18" charset="0"/>
+                      </a:rPr>
+                      <m:t>=</m:t>
+                    </m:r>
+                    <m:d>
+                      <m:dPr>
+                        <m:ctrlPr>
+                          <a:rPr lang="de-DE" sz="2400" i="1">
+                            <a:latin typeface="Cambria Math" panose="02040503050406030204" pitchFamily="18" charset="0"/>
+                          </a:rPr>
+                        </m:ctrlPr>
+                      </m:dPr>
+                      <m:e>
+                        <m:r>
+                          <a:rPr lang="de-DE" sz="2400" i="1">
+                            <a:latin typeface="Cambria Math" panose="02040503050406030204" pitchFamily="18" charset="0"/>
+                          </a:rPr>
+                          <m:t>𝐴</m:t>
+                        </m:r>
+                        <m:r>
+                          <a:rPr lang="de-DE" sz="2400" i="1">
+                            <a:latin typeface="Cambria Math" panose="02040503050406030204" pitchFamily="18" charset="0"/>
+                          </a:rPr>
+                          <m:t>−</m:t>
+                        </m:r>
+                        <m:r>
+                          <a:rPr lang="de-DE" sz="2400" b="0" i="1" smtClean="0">
+                            <a:latin typeface="Cambria Math" panose="02040503050406030204" pitchFamily="18" charset="0"/>
+                          </a:rPr>
+                          <m:t>𝐿𝐶</m:t>
+                        </m:r>
+                      </m:e>
+                    </m:d>
+                    <m:r>
+                      <a:rPr lang="de-DE" sz="2400" b="0" i="1" smtClean="0">
+                        <a:latin typeface="Cambria Math" panose="02040503050406030204" pitchFamily="18" charset="0"/>
+                      </a:rPr>
+                      <m:t>𝑒</m:t>
+                    </m:r>
+                  </m:oMath>
+                </a14:m>
+                <a:endParaRPr lang="de-DE" sz="2400" dirty="0"/>
+              </a:p>
+              <a:p>
+                <a:r>
+                  <a:rPr lang="de-DE" sz="2400" dirty="0">
+                    <a:sym typeface="Wingdings" pitchFamily="2" charset="2"/>
+                  </a:rPr>
+                  <a:t> Observer pole </a:t>
+                </a:r>
+                <a:r>
+                  <a:rPr lang="de-DE" sz="2400" dirty="0" err="1">
+                    <a:sym typeface="Wingdings" pitchFamily="2" charset="2"/>
+                  </a:rPr>
+                  <a:t>placement</a:t>
+                </a:r>
+                <a:endParaRPr lang="de-DE" sz="2400" dirty="0"/>
+              </a:p>
+            </p:txBody>
+          </p:sp>
+        </mc:Choice>
+        <mc:Fallback xmlns="">
+          <p:sp>
+            <p:nvSpPr>
+              <p:cNvPr id="8" name="Textfeld 7">
+                <a:extLst>
+                  <a:ext uri="{FF2B5EF4-FFF2-40B4-BE49-F238E27FC236}">
+                    <a16:creationId xmlns:a16="http://schemas.microsoft.com/office/drawing/2014/main" id="{32A56BE6-F9F7-CB89-3454-D39B73FD40F7}"/>
+                  </a:ext>
+                </a:extLst>
+              </p:cNvPr>
+              <p:cNvSpPr txBox="1">
+                <a:spLocks noRot="1" noChangeAspect="1" noMove="1" noResize="1" noEditPoints="1" noAdjustHandles="1" noChangeArrowheads="1" noChangeShapeType="1" noTextEdit="1"/>
+              </p:cNvSpPr>
+              <p:nvPr/>
+            </p:nvSpPr>
+            <p:spPr>
+              <a:xfrm>
+                <a:off x="7289446" y="3531352"/>
+                <a:ext cx="4591128" cy="1569660"/>
+              </a:xfrm>
+              <a:prstGeom prst="rect">
+                <a:avLst/>
+              </a:prstGeom>
+              <a:blipFill>
+                <a:blip r:embed="rId3"/>
+                <a:stretch>
+                  <a:fillRect l="-2210" t="-2400" b="-8800"/>
+                </a:stretch>
+              </a:blipFill>
+            </p:spPr>
+            <p:txBody>
+              <a:bodyPr/>
+              <a:lstStyle/>
+              <a:p>
+                <a:r>
+                  <a:rPr lang="de-DE">
+                    <a:noFill/>
+                  </a:rPr>
+                  <a:t> </a:t>
+                </a:r>
+              </a:p>
+            </p:txBody>
+          </p:sp>
+        </mc:Fallback>
+      </mc:AlternateContent>
+      <p:cxnSp>
+        <p:nvCxnSpPr>
+          <p:cNvPr id="11" name="Gerade Verbindung mit Pfeil 10">
+            <a:extLst>
+              <a:ext uri="{FF2B5EF4-FFF2-40B4-BE49-F238E27FC236}">
+                <a16:creationId xmlns:a16="http://schemas.microsoft.com/office/drawing/2014/main" id="{198CFFAE-B9BC-D3C5-1123-014BDF347AC9}"/>
+              </a:ext>
+            </a:extLst>
+          </p:cNvPr>
+          <p:cNvCxnSpPr>
+            <a:endCxn id="5" idx="1"/>
+          </p:cNvCxnSpPr>
+          <p:nvPr/>
+        </p:nvCxnSpPr>
+        <p:spPr>
+          <a:xfrm flipH="1">
+            <a:off x="4721087" y="3946851"/>
+            <a:ext cx="2524539" cy="0"/>
           </a:xfrm>
           <a:prstGeom prst="straightConnector1">
             <a:avLst/>
@@ -11478,10 +13476,15 @@
                 <p:ph idx="1"/>
               </p:nvPr>
             </p:nvSpPr>
-            <p:spPr/>
+            <p:spPr>
+              <a:xfrm>
+                <a:off x="838200" y="1690689"/>
+                <a:ext cx="10515600" cy="2565400"/>
+              </a:xfrm>
+            </p:spPr>
             <p:txBody>
               <a:bodyPr>
-                <a:normAutofit fontScale="92500" lnSpcReduction="20000"/>
+                <a:normAutofit fontScale="85000" lnSpcReduction="20000"/>
               </a:bodyPr>
               <a:lstStyle/>
               <a:p>
@@ -11520,12 +13523,6 @@
                   <a:rPr lang="de-DE" dirty="0" err="1"/>
                   <a:t>systems</a:t>
                 </a:r>
-                <a:endParaRPr lang="de-DE" dirty="0"/>
-              </a:p>
-              <a:p>
-                <a:pPr marL="0" indent="0">
-                  <a:buNone/>
-                </a:pPr>
                 <a:endParaRPr lang="de-DE" dirty="0"/>
               </a:p>
               <a:p>
@@ -11673,7 +13670,7 @@
                 </a14:m>
                 <a:r>
                   <a:rPr lang="de-DE" dirty="0"/>
-                  <a:t>,	</a:t>
+                  <a:t>,		</a:t>
                 </a:r>
                 <a14:m>
                   <m:oMath xmlns:m="http://schemas.openxmlformats.org/officeDocument/2006/math">
@@ -11715,15 +13712,37 @@
                 <a:pPr marL="0" indent="0">
                   <a:buNone/>
                 </a:pPr>
-                <a:endParaRPr lang="de-DE" dirty="0"/>
-              </a:p>
-              <a:p>
-                <a:pPr marL="0" indent="0">
-                  <a:buNone/>
-                </a:pPr>
+                <a:r>
+                  <a:rPr lang="de-DE" dirty="0"/>
+                  <a:t>Same </a:t>
+                </a:r>
                 <a:r>
                   <a:rPr lang="de-DE" dirty="0" err="1"/>
-                  <a:t>Estimator</a:t>
+                  <a:t>structure</a:t>
+                </a:r>
+                <a:r>
+                  <a:rPr lang="de-DE" dirty="0"/>
+                  <a:t> </a:t>
+                </a:r>
+                <a:r>
+                  <a:rPr lang="de-DE" dirty="0" err="1"/>
+                  <a:t>as</a:t>
+                </a:r>
+                <a:r>
+                  <a:rPr lang="de-DE" dirty="0"/>
+                  <a:t> </a:t>
+                </a:r>
+                <a:r>
+                  <a:rPr lang="de-DE" dirty="0" err="1"/>
+                  <a:t>general</a:t>
+                </a:r>
+                <a:r>
+                  <a:rPr lang="de-DE" dirty="0"/>
+                  <a:t> </a:t>
+                </a:r>
+                <a:r>
+                  <a:rPr lang="de-DE" dirty="0" err="1"/>
+                  <a:t>observer</a:t>
                 </a:r>
                 <a:r>
                   <a:rPr lang="de-DE" dirty="0"/>
@@ -11762,7 +13781,7 @@
                       </m:e>
                     </m:acc>
                     <m:r>
-                      <a:rPr lang="de-DE" i="1">
+                      <a:rPr lang="de-DE" i="1" smtClean="0">
                         <a:latin typeface="Cambria Math" panose="02040503050406030204" pitchFamily="18" charset="0"/>
                       </a:rPr>
                       <m:t>=</m:t>
@@ -11876,9 +13895,6 @@
                     </m:d>
                   </m:oMath>
                 </a14:m>
-                <a:br>
-                  <a:rPr lang="de-DE" dirty="0"/>
-                </a:br>
                 <a:endParaRPr lang="de-DE" dirty="0"/>
               </a:p>
               <a:p>
@@ -11887,15 +13903,15 @@
                 </a:pPr>
                 <a:r>
                   <a:rPr lang="de-DE" dirty="0"/>
-                  <a:t>Key </a:t>
+                  <a:t>But </a:t>
                 </a:r>
                 <a:r>
                   <a:rPr lang="de-DE" dirty="0" err="1"/>
-                  <a:t>concept</a:t>
+                  <a:t>chooses</a:t>
                 </a:r>
                 <a:r>
                   <a:rPr lang="de-DE" dirty="0"/>
-                  <a:t>: </a:t>
+                  <a:t> </a:t>
                 </a:r>
                 <a:r>
                   <a:rPr lang="de-DE" dirty="0" err="1"/>
@@ -11929,17 +13945,17 @@
                 </a:r>
                 <a:r>
                   <a:rPr lang="de-DE" dirty="0" err="1"/>
-                  <a:t>is</a:t>
+                  <a:t>optimally</a:t>
                 </a:r>
                 <a:r>
                   <a:rPr lang="de-DE" dirty="0"/>
-                  <a:t> optimal </a:t>
-                </a:r>
-                <a:r>
-                  <a:rPr lang="de-DE" dirty="0">
+                  <a:t> </a:t>
+                </a:r>
+                <a:r>
+                  <a:rPr lang="de-DE" dirty="0" err="1">
                     <a:sym typeface="Wingdings" pitchFamily="2" charset="2"/>
                   </a:rPr>
-                  <a:t></a:t>
+                  <a:t>by</a:t>
                 </a:r>
                 <a:r>
                   <a:rPr lang="de-DE" dirty="0"/>
@@ -11947,7 +13963,7 @@
                 </a:r>
                 <a:r>
                   <a:rPr lang="de-DE" dirty="0" err="1"/>
-                  <a:t>minimizes</a:t>
+                  <a:t>minimizing</a:t>
                 </a:r>
                 <a:r>
                   <a:rPr lang="de-DE" dirty="0"/>
@@ -11955,7 +13971,7 @@
                 </a:r>
                 <a:r>
                   <a:rPr lang="de-DE" dirty="0" err="1"/>
-                  <a:t>estimation</a:t>
+                  <a:t>the</a:t>
                 </a:r>
                 <a:r>
                   <a:rPr lang="de-DE" dirty="0"/>
@@ -11963,7 +13979,7 @@
                 </a:r>
                 <a:r>
                   <a:rPr lang="de-DE" dirty="0" err="1"/>
-                  <a:t>error</a:t>
+                  <a:t>estimation</a:t>
                 </a:r>
                 <a:r>
                   <a:rPr lang="de-DE" dirty="0"/>
@@ -11971,12 +13987,36 @@
                 </a:r>
                 <a:r>
                   <a:rPr lang="de-DE" dirty="0" err="1"/>
-                  <a:t>covariance</a:t>
-                </a:r>
-                <a:br>
+                  <a:t>error</a:t>
+                </a:r>
+                <a:r>
                   <a:rPr lang="de-DE" dirty="0"/>
-                </a:br>
-                <a:endParaRPr lang="de-DE" dirty="0"/>
+                  <a:t> (</a:t>
+                </a:r>
+                <a:r>
+                  <a:rPr lang="de-DE" dirty="0" err="1"/>
+                  <a:t>analogous</a:t>
+                </a:r>
+                <a:r>
+                  <a:rPr lang="de-DE" dirty="0"/>
+                  <a:t> </a:t>
+                </a:r>
+                <a:r>
+                  <a:rPr lang="de-DE" dirty="0" err="1"/>
+                  <a:t>to</a:t>
+                </a:r>
+                <a:r>
+                  <a:rPr lang="de-DE" dirty="0"/>
+                  <a:t> pole </a:t>
+                </a:r>
+                <a:r>
+                  <a:rPr lang="de-DE" dirty="0" err="1"/>
+                  <a:t>placement</a:t>
+                </a:r>
+                <a:r>
+                  <a:rPr lang="de-DE" dirty="0"/>
+                  <a:t> and LQR)</a:t>
+                </a:r>
               </a:p>
               <a:p>
                 <a:pPr marL="0" indent="0">
@@ -12057,10 +14097,14 @@
               </p:nvPr>
             </p:nvSpPr>
             <p:spPr>
+              <a:xfrm>
+                <a:off x="838200" y="1690689"/>
+                <a:ext cx="10515600" cy="2565400"/>
+              </a:xfrm>
               <a:blipFill>
                 <a:blip r:embed="rId2"/>
                 <a:stretch>
-                  <a:fillRect l="-1086" t="-3488"/>
+                  <a:fillRect l="-965" t="-4902" b="-4902"/>
                 </a:stretch>
               </a:blipFill>
             </p:spPr>
@@ -12108,6 +14152,53 @@
           </a:p>
         </p:txBody>
       </p:sp>
+      <p:pic>
+        <p:nvPicPr>
+          <p:cNvPr id="2050" name="Picture 2" descr="Kalman-Filterung - MATLAB &amp; Simulink">
+            <a:extLst>
+              <a:ext uri="{FF2B5EF4-FFF2-40B4-BE49-F238E27FC236}">
+                <a16:creationId xmlns:a16="http://schemas.microsoft.com/office/drawing/2014/main" id="{A7470E19-C1CA-0667-D2AF-F4801CD35259}"/>
+              </a:ext>
+            </a:extLst>
+          </p:cNvPr>
+          <p:cNvPicPr>
+            <a:picLocks noChangeAspect="1" noChangeArrowheads="1"/>
+          </p:cNvPicPr>
+          <p:nvPr/>
+        </p:nvPicPr>
+        <p:blipFill>
+          <a:blip r:embed="rId3">
+            <a:extLst>
+              <a:ext uri="{28A0092B-C50C-407E-A947-70E740481C1C}">
+                <a14:useLocalDpi xmlns:a14="http://schemas.microsoft.com/office/drawing/2010/main" val="0"/>
+              </a:ext>
+            </a:extLst>
+          </a:blip>
+          <a:srcRect/>
+          <a:stretch>
+            <a:fillRect/>
+          </a:stretch>
+        </p:blipFill>
+        <p:spPr bwMode="auto">
+          <a:xfrm>
+            <a:off x="1847850" y="4292600"/>
+            <a:ext cx="8496300" cy="2565400"/>
+          </a:xfrm>
+          <a:prstGeom prst="rect">
+            <a:avLst/>
+          </a:prstGeom>
+          <a:noFill/>
+          <a:extLst>
+            <a:ext uri="{909E8E84-426E-40DD-AFC4-6F175D3DCCD1}">
+              <a14:hiddenFill xmlns:a14="http://schemas.microsoft.com/office/drawing/2010/main">
+                <a:solidFill>
+                  <a:srgbClr val="FFFFFF"/>
+                </a:solidFill>
+              </a14:hiddenFill>
+            </a:ext>
+          </a:extLst>
+        </p:spPr>
+      </p:pic>
     </p:spTree>
     <p:extLst>
       <p:ext uri="{BB962C8B-B14F-4D97-AF65-F5344CB8AC3E}">
@@ -12440,7 +14531,23 @@
           <a:p>
             <a:r>
               <a:rPr lang="de-DE" dirty="0"/>
-              <a:t>Modern Control Architecture</a:t>
+              <a:t>Linear </a:t>
+            </a:r>
+            <a:r>
+              <a:rPr lang="de-DE" dirty="0" err="1"/>
+              <a:t>Quadratic</a:t>
+            </a:r>
+            <a:r>
+              <a:rPr lang="de-DE" dirty="0"/>
+              <a:t> </a:t>
+            </a:r>
+            <a:r>
+              <a:rPr lang="de-DE" dirty="0" err="1"/>
+              <a:t>Gaussian</a:t>
+            </a:r>
+            <a:r>
+              <a:rPr lang="de-DE" dirty="0"/>
+              <a:t> (LQG) Control</a:t>
             </a:r>
           </a:p>
         </p:txBody>
@@ -12463,10 +14570,15 @@
                 <p:ph idx="1"/>
               </p:nvPr>
             </p:nvSpPr>
-            <p:spPr/>
+            <p:spPr>
+              <a:xfrm>
+                <a:off x="838200" y="1690688"/>
+                <a:ext cx="10515600" cy="5030787"/>
+              </a:xfrm>
+            </p:spPr>
             <p:txBody>
               <a:bodyPr>
-                <a:normAutofit/>
+                <a:normAutofit lnSpcReduction="10000"/>
               </a:bodyPr>
               <a:lstStyle/>
               <a:p>
@@ -12474,36 +14586,52 @@
                   <a:buNone/>
                 </a:pPr>
                 <a:r>
-                  <a:rPr lang="de-DE" dirty="0" err="1"/>
+                  <a:rPr lang="de-DE" sz="2400" dirty="0" err="1"/>
                   <a:t>Combination</a:t>
                 </a:r>
                 <a:r>
-                  <a:rPr lang="de-DE" dirty="0"/>
+                  <a:rPr lang="de-DE" sz="2400" dirty="0"/>
                   <a:t> </a:t>
                 </a:r>
                 <a:r>
-                  <a:rPr lang="de-DE" dirty="0" err="1"/>
+                  <a:rPr lang="de-DE" sz="2400" dirty="0" err="1"/>
                   <a:t>of</a:t>
                 </a:r>
                 <a:r>
-                  <a:rPr lang="de-DE" dirty="0"/>
+                  <a:rPr lang="de-DE" sz="2400" dirty="0"/>
                   <a:t> </a:t>
                 </a:r>
                 <a:r>
-                  <a:rPr lang="de-DE" dirty="0" err="1"/>
+                  <a:rPr lang="de-DE" sz="2400" dirty="0" err="1"/>
                   <a:t>both</a:t>
                 </a:r>
                 <a:r>
-                  <a:rPr lang="de-DE" dirty="0"/>
+                  <a:rPr lang="de-DE" sz="2400" dirty="0"/>
                   <a:t> </a:t>
                 </a:r>
                 <a:r>
-                  <a:rPr lang="de-DE" dirty="0" err="1"/>
+                  <a:rPr lang="de-DE" sz="2400" dirty="0" err="1"/>
                   <a:t>ideas</a:t>
                 </a:r>
                 <a:r>
-                  <a:rPr lang="de-DE" dirty="0"/>
-                  <a:t>:</a:t>
+                  <a:rPr lang="de-DE" sz="2400" dirty="0"/>
+                  <a:t> (modern </a:t>
+                </a:r>
+                <a:r>
+                  <a:rPr lang="de-DE" sz="2400" dirty="0" err="1"/>
+                  <a:t>control</a:t>
+                </a:r>
+                <a:r>
+                  <a:rPr lang="de-DE" sz="2400" dirty="0"/>
+                  <a:t> </a:t>
+                </a:r>
+                <a:r>
+                  <a:rPr lang="de-DE" sz="2400" dirty="0" err="1"/>
+                  <a:t>architecture</a:t>
+                </a:r>
+                <a:r>
+                  <a:rPr lang="de-DE" sz="2400" dirty="0"/>
+                  <a:t>):</a:t>
                 </a:r>
               </a:p>
               <a:p>
@@ -12511,19 +14639,19 @@
                   <a:buNone/>
                 </a:pPr>
                 <a:r>
-                  <a:rPr lang="de-DE" dirty="0"/>
+                  <a:rPr lang="de-DE" sz="2400" dirty="0"/>
                   <a:t>	Observer (</a:t>
                 </a:r>
                 <a:r>
-                  <a:rPr lang="de-DE" dirty="0" err="1"/>
+                  <a:rPr lang="de-DE" sz="2400" dirty="0" err="1"/>
                   <a:t>estimation</a:t>
                 </a:r>
                 <a:r>
-                  <a:rPr lang="de-DE" dirty="0"/>
+                  <a:rPr lang="de-DE" sz="2400" dirty="0"/>
                   <a:t>) </a:t>
                 </a:r>
                 <a:r>
-                  <a:rPr lang="de-DE" dirty="0">
+                  <a:rPr lang="de-DE" sz="2400" dirty="0">
                     <a:sym typeface="Wingdings" pitchFamily="2" charset="2"/>
                   </a:rPr>
                   <a:t> </a:t>
@@ -12534,14 +14662,14 @@
                       <m:accPr>
                         <m:chr m:val="̂"/>
                         <m:ctrlPr>
-                          <a:rPr lang="de-DE" i="1">
+                          <a:rPr lang="de-DE" sz="2400" i="1">
                             <a:latin typeface="Cambria Math" panose="02040503050406030204" pitchFamily="18" charset="0"/>
                           </a:rPr>
                         </m:ctrlPr>
                       </m:accPr>
                       <m:e>
                         <m:r>
-                          <a:rPr lang="de-DE" i="1">
+                          <a:rPr lang="de-DE" sz="2400" i="1">
                             <a:latin typeface="Cambria Math" panose="02040503050406030204" pitchFamily="18" charset="0"/>
                           </a:rPr>
                           <m:t>𝑥</m:t>
@@ -12551,14 +14679,14 @@
                     <m:d>
                       <m:dPr>
                         <m:ctrlPr>
-                          <a:rPr lang="de-DE" i="1">
+                          <a:rPr lang="de-DE" sz="2400" i="1">
                             <a:latin typeface="Cambria Math" panose="02040503050406030204" pitchFamily="18" charset="0"/>
                           </a:rPr>
                         </m:ctrlPr>
                       </m:dPr>
                       <m:e>
                         <m:r>
-                          <a:rPr lang="de-DE" i="1">
+                          <a:rPr lang="de-DE" sz="2400" i="1">
                             <a:latin typeface="Cambria Math" panose="02040503050406030204" pitchFamily="18" charset="0"/>
                           </a:rPr>
                           <m:t>𝑡</m:t>
@@ -12568,23 +14696,133 @@
                   </m:oMath>
                 </a14:m>
                 <a:r>
-                  <a:rPr lang="de-DE" dirty="0">
+                  <a:rPr lang="de-DE" sz="2400" dirty="0">
                     <a:sym typeface="Wingdings" pitchFamily="2" charset="2"/>
                   </a:rPr>
                   <a:t>  </a:t>
                 </a:r>
                 <a:r>
-                  <a:rPr lang="de-DE" dirty="0"/>
+                  <a:rPr lang="de-DE" sz="2400" dirty="0"/>
                   <a:t>State Feedback (</a:t>
                 </a:r>
                 <a:r>
-                  <a:rPr lang="de-DE" dirty="0" err="1"/>
+                  <a:rPr lang="de-DE" sz="2400" dirty="0" err="1"/>
                   <a:t>control</a:t>
                 </a:r>
                 <a:r>
-                  <a:rPr lang="de-DE" dirty="0"/>
+                  <a:rPr lang="de-DE" sz="2400" dirty="0"/>
                   <a:t>)</a:t>
                 </a:r>
+              </a:p>
+              <a:p>
+                <a:pPr marL="0" indent="0">
+                  <a:buNone/>
+                </a:pPr>
+                <a:endParaRPr lang="de-DE" sz="2400" dirty="0"/>
+              </a:p>
+              <a:p>
+                <a:pPr marL="0" indent="0">
+                  <a:buNone/>
+                </a:pPr>
+                <a:endParaRPr lang="de-DE" sz="2400" dirty="0"/>
+              </a:p>
+              <a:p>
+                <a:pPr marL="0" indent="0">
+                  <a:buNone/>
+                </a:pPr>
+                <a:endParaRPr lang="de-DE" sz="2400" dirty="0"/>
+              </a:p>
+              <a:p>
+                <a:pPr marL="0" indent="0">
+                  <a:buNone/>
+                </a:pPr>
+                <a:endParaRPr lang="de-DE" sz="2400" dirty="0"/>
+              </a:p>
+              <a:p>
+                <a:pPr marL="0" indent="0">
+                  <a:buNone/>
+                </a:pPr>
+                <a:endParaRPr lang="de-DE" sz="2400" dirty="0"/>
+              </a:p>
+              <a:p>
+                <a:pPr marL="0" indent="0">
+                  <a:buNone/>
+                </a:pPr>
+                <a:endParaRPr lang="de-DE" sz="2400" dirty="0"/>
+              </a:p>
+              <a:p>
+                <a:pPr marL="0" indent="0">
+                  <a:buNone/>
+                </a:pPr>
+                <a:endParaRPr lang="de-DE" sz="2400" dirty="0"/>
+              </a:p>
+              <a:p>
+                <a:pPr marL="0" indent="0">
+                  <a:buNone/>
+                </a:pPr>
+                <a:endParaRPr lang="de-DE" sz="2400" dirty="0"/>
+              </a:p>
+              <a:p>
+                <a:pPr marL="0" indent="0">
+                  <a:buNone/>
+                </a:pPr>
+                <a:r>
+                  <a:rPr lang="de-DE" sz="2400" dirty="0"/>
+                  <a:t>Separation </a:t>
+                </a:r>
+                <a:r>
+                  <a:rPr lang="de-DE" sz="2400" dirty="0" err="1"/>
+                  <a:t>principle</a:t>
+                </a:r>
+                <a:r>
+                  <a:rPr lang="de-DE" sz="2400" dirty="0"/>
+                  <a:t>: </a:t>
+                </a:r>
+                <a:r>
+                  <a:rPr lang="de-DE" sz="2400" dirty="0" err="1"/>
+                  <a:t>controller</a:t>
+                </a:r>
+                <a:r>
+                  <a:rPr lang="de-DE" sz="2400" dirty="0"/>
+                  <a:t> design (LQR) and </a:t>
+                </a:r>
+                <a:r>
+                  <a:rPr lang="de-DE" sz="2400" dirty="0" err="1"/>
+                  <a:t>estimator</a:t>
+                </a:r>
+                <a:r>
+                  <a:rPr lang="de-DE" sz="2400" dirty="0"/>
+                  <a:t> design (Kalman) </a:t>
+                </a:r>
+                <a:r>
+                  <a:rPr lang="de-DE" sz="2400" dirty="0" err="1"/>
+                  <a:t>can</a:t>
+                </a:r>
+                <a:r>
+                  <a:rPr lang="de-DE" sz="2400" dirty="0"/>
+                  <a:t> </a:t>
+                </a:r>
+                <a:r>
+                  <a:rPr lang="de-DE" sz="2400" dirty="0" err="1"/>
+                  <a:t>be</a:t>
+                </a:r>
+                <a:r>
+                  <a:rPr lang="de-DE" sz="2400" dirty="0"/>
+                  <a:t> </a:t>
+                </a:r>
+                <a:r>
+                  <a:rPr lang="de-DE" sz="2400" dirty="0" err="1"/>
+                  <a:t>done</a:t>
+                </a:r>
+                <a:r>
+                  <a:rPr lang="de-DE" sz="2400" dirty="0"/>
+                  <a:t> </a:t>
+                </a:r>
+                <a:r>
+                  <a:rPr lang="de-DE" sz="2400" dirty="0" err="1"/>
+                  <a:t>independently</a:t>
+                </a:r>
+                <a:endParaRPr lang="de-DE" sz="2400" dirty="0"/>
               </a:p>
             </p:txBody>
           </p:sp>
@@ -12607,10 +14845,14 @@
               </p:nvPr>
             </p:nvSpPr>
             <p:spPr>
+              <a:xfrm>
+                <a:off x="838200" y="1690688"/>
+                <a:ext cx="10515600" cy="5030787"/>
+              </a:xfrm>
               <a:blipFill>
                 <a:blip r:embed="rId2"/>
                 <a:stretch>
-                  <a:fillRect l="-1206" t="-2326"/>
+                  <a:fillRect l="-965" t="-2010"/>
                 </a:stretch>
               </a:blipFill>
             </p:spPr>
@@ -12660,10 +14902,10 @@
       </p:sp>
       <p:sp>
         <p:nvSpPr>
-          <p:cNvPr id="6" name="Textfeld 5">
+          <p:cNvPr id="7" name="Textfeld 6">
             <a:extLst>
               <a:ext uri="{FF2B5EF4-FFF2-40B4-BE49-F238E27FC236}">
-                <a16:creationId xmlns:a16="http://schemas.microsoft.com/office/drawing/2014/main" id="{898D7C43-568B-37B6-9FB0-26EAD7C3EB65}"/>
+                <a16:creationId xmlns:a16="http://schemas.microsoft.com/office/drawing/2014/main" id="{D55A64AF-0BE9-7FB2-A882-B6C1A1158E52}"/>
               </a:ext>
             </a:extLst>
           </p:cNvPr>
@@ -12672,8 +14914,8 @@
         </p:nvSpPr>
         <p:spPr>
           <a:xfrm>
-            <a:off x="3521819" y="4001294"/>
-            <a:ext cx="5148361" cy="369332"/>
+            <a:off x="6456265" y="2814236"/>
+            <a:ext cx="5067141" cy="461665"/>
           </a:xfrm>
           <a:prstGeom prst="rect">
             <a:avLst/>
@@ -12687,20 +14929,250 @@
           <a:lstStyle/>
           <a:p>
             <a:r>
-              <a:rPr lang="de-DE" dirty="0"/>
-              <a:t>Include </a:t>
-            </a:r>
-            <a:r>
-              <a:rPr lang="de-DE" dirty="0" err="1"/>
-              <a:t>diagram</a:t>
-            </a:r>
-            <a:r>
-              <a:rPr lang="de-DE" dirty="0"/>
-              <a:t>: Plant, Observer, Feedback loop</a:t>
-            </a:r>
+              <a:rPr lang="de-DE" sz="2400" dirty="0"/>
+              <a:t>LQR: </a:t>
+            </a:r>
+            <a:r>
+              <a:rPr lang="de-DE" sz="2400" dirty="0" err="1"/>
+              <a:t>computes</a:t>
+            </a:r>
+            <a:r>
+              <a:rPr lang="de-DE" sz="2400" dirty="0"/>
+              <a:t> optimal </a:t>
+            </a:r>
+            <a:r>
+              <a:rPr lang="de-DE" sz="2400" dirty="0" err="1"/>
+              <a:t>control</a:t>
+            </a:r>
+            <a:r>
+              <a:rPr lang="de-DE" sz="2400" dirty="0"/>
+              <a:t> </a:t>
+            </a:r>
+            <a:r>
+              <a:rPr lang="de-DE" sz="2400" dirty="0" err="1"/>
+              <a:t>input</a:t>
+            </a:r>
+            <a:endParaRPr lang="de-DE" sz="2400" dirty="0"/>
           </a:p>
         </p:txBody>
       </p:sp>
+      <p:sp>
+        <p:nvSpPr>
+          <p:cNvPr id="9" name="Textfeld 8">
+            <a:extLst>
+              <a:ext uri="{FF2B5EF4-FFF2-40B4-BE49-F238E27FC236}">
+                <a16:creationId xmlns:a16="http://schemas.microsoft.com/office/drawing/2014/main" id="{53FCC49E-BEBB-28A5-79B9-6E354F76D859}"/>
+              </a:ext>
+            </a:extLst>
+          </p:cNvPr>
+          <p:cNvSpPr txBox="1"/>
+          <p:nvPr/>
+        </p:nvSpPr>
+        <p:spPr>
+          <a:xfrm>
+            <a:off x="838200" y="2826688"/>
+            <a:ext cx="4733511" cy="830997"/>
+          </a:xfrm>
+          <a:prstGeom prst="rect">
+            <a:avLst/>
+          </a:prstGeom>
+          <a:noFill/>
+        </p:spPr>
+        <p:txBody>
+          <a:bodyPr wrap="square">
+            <a:spAutoFit/>
+          </a:bodyPr>
+          <a:lstStyle/>
+          <a:p>
+            <a:r>
+              <a:rPr lang="de-DE" sz="2400" dirty="0"/>
+              <a:t>Kalman </a:t>
+            </a:r>
+            <a:r>
+              <a:rPr lang="de-DE" sz="2400" dirty="0" err="1"/>
+              <a:t>filter</a:t>
+            </a:r>
+            <a:r>
+              <a:rPr lang="de-DE" sz="2400" dirty="0"/>
+              <a:t>: </a:t>
+            </a:r>
+            <a:r>
+              <a:rPr lang="de-DE" sz="2400" dirty="0" err="1"/>
+              <a:t>estimates</a:t>
+            </a:r>
+            <a:r>
+              <a:rPr lang="de-DE" sz="2400" dirty="0"/>
+              <a:t> </a:t>
+            </a:r>
+            <a:r>
+              <a:rPr lang="de-DE" sz="2400" dirty="0" err="1"/>
+              <a:t>system</a:t>
+            </a:r>
+            <a:r>
+              <a:rPr lang="de-DE" sz="2400" dirty="0"/>
+              <a:t> </a:t>
+            </a:r>
+            <a:r>
+              <a:rPr lang="de-DE" sz="2400" dirty="0" err="1"/>
+              <a:t>state</a:t>
+            </a:r>
+            <a:r>
+              <a:rPr lang="de-DE" sz="2400" dirty="0"/>
+              <a:t> </a:t>
+            </a:r>
+            <a:r>
+              <a:rPr lang="de-DE" sz="2400" dirty="0" err="1"/>
+              <a:t>from</a:t>
+            </a:r>
+            <a:r>
+              <a:rPr lang="de-DE" sz="2400" dirty="0"/>
+              <a:t> </a:t>
+            </a:r>
+            <a:r>
+              <a:rPr lang="de-DE" sz="2400" dirty="0" err="1"/>
+              <a:t>noisy</a:t>
+            </a:r>
+            <a:r>
+              <a:rPr lang="de-DE" sz="2400" dirty="0"/>
+              <a:t> </a:t>
+            </a:r>
+            <a:r>
+              <a:rPr lang="de-DE" sz="2400" dirty="0" err="1"/>
+              <a:t>measurements</a:t>
+            </a:r>
+            <a:endParaRPr lang="de-DE" sz="2400" dirty="0"/>
+          </a:p>
+        </p:txBody>
+      </p:sp>
+      <p:cxnSp>
+        <p:nvCxnSpPr>
+          <p:cNvPr id="11" name="Gerade Verbindung mit Pfeil 10">
+            <a:extLst>
+              <a:ext uri="{FF2B5EF4-FFF2-40B4-BE49-F238E27FC236}">
+                <a16:creationId xmlns:a16="http://schemas.microsoft.com/office/drawing/2014/main" id="{CCBC9438-5348-EEDF-5A58-91E57EB118A3}"/>
+              </a:ext>
+            </a:extLst>
+          </p:cNvPr>
+          <p:cNvCxnSpPr>
+            <a:cxnSpLocks/>
+          </p:cNvCxnSpPr>
+          <p:nvPr/>
+        </p:nvCxnSpPr>
+        <p:spPr>
+          <a:xfrm flipV="1">
+            <a:off x="1892991" y="2439634"/>
+            <a:ext cx="137958" cy="387054"/>
+          </a:xfrm>
+          <a:prstGeom prst="straightConnector1">
+            <a:avLst/>
+          </a:prstGeom>
+          <a:ln>
+            <a:tailEnd type="triangle"/>
+          </a:ln>
+        </p:spPr>
+        <p:style>
+          <a:lnRef idx="2">
+            <a:schemeClr val="accent1"/>
+          </a:lnRef>
+          <a:fillRef idx="0">
+            <a:schemeClr val="accent1"/>
+          </a:fillRef>
+          <a:effectRef idx="1">
+            <a:schemeClr val="accent1"/>
+          </a:effectRef>
+          <a:fontRef idx="minor">
+            <a:schemeClr val="tx1"/>
+          </a:fontRef>
+        </p:style>
+      </p:cxnSp>
+      <p:cxnSp>
+        <p:nvCxnSpPr>
+          <p:cNvPr id="13" name="Gerade Verbindung mit Pfeil 12">
+            <a:extLst>
+              <a:ext uri="{FF2B5EF4-FFF2-40B4-BE49-F238E27FC236}">
+                <a16:creationId xmlns:a16="http://schemas.microsoft.com/office/drawing/2014/main" id="{009ECCAB-9A8D-505C-44F7-5F49112A1F5F}"/>
+              </a:ext>
+            </a:extLst>
+          </p:cNvPr>
+          <p:cNvCxnSpPr>
+            <a:cxnSpLocks/>
+          </p:cNvCxnSpPr>
+          <p:nvPr/>
+        </p:nvCxnSpPr>
+        <p:spPr>
+          <a:xfrm flipV="1">
+            <a:off x="6863356" y="2439634"/>
+            <a:ext cx="103974" cy="374602"/>
+          </a:xfrm>
+          <a:prstGeom prst="straightConnector1">
+            <a:avLst/>
+          </a:prstGeom>
+          <a:ln>
+            <a:tailEnd type="triangle"/>
+          </a:ln>
+        </p:spPr>
+        <p:style>
+          <a:lnRef idx="2">
+            <a:schemeClr val="accent1"/>
+          </a:lnRef>
+          <a:fillRef idx="0">
+            <a:schemeClr val="accent1"/>
+          </a:fillRef>
+          <a:effectRef idx="1">
+            <a:schemeClr val="accent1"/>
+          </a:effectRef>
+          <a:fontRef idx="minor">
+            <a:schemeClr val="tx1"/>
+          </a:fontRef>
+        </p:style>
+      </p:cxnSp>
+      <p:pic>
+        <p:nvPicPr>
+          <p:cNvPr id="1026" name="Picture 2" descr="Linear-Quadratic-Gaussian (LQG) Design - MATLAB &amp; Simulink">
+            <a:extLst>
+              <a:ext uri="{FF2B5EF4-FFF2-40B4-BE49-F238E27FC236}">
+                <a16:creationId xmlns:a16="http://schemas.microsoft.com/office/drawing/2014/main" id="{D889EC88-FEF0-F1C3-576B-57B1846234F4}"/>
+              </a:ext>
+            </a:extLst>
+          </p:cNvPr>
+          <p:cNvPicPr>
+            <a:picLocks noChangeAspect="1" noChangeArrowheads="1"/>
+          </p:cNvPicPr>
+          <p:nvPr/>
+        </p:nvPicPr>
+        <p:blipFill>
+          <a:blip r:embed="rId3">
+            <a:extLst>
+              <a:ext uri="{28A0092B-C50C-407E-A947-70E740481C1C}">
+                <a14:useLocalDpi xmlns:a14="http://schemas.microsoft.com/office/drawing/2010/main" val="0"/>
+              </a:ext>
+            </a:extLst>
+          </a:blip>
+          <a:srcRect/>
+          <a:stretch>
+            <a:fillRect/>
+          </a:stretch>
+        </p:blipFill>
+        <p:spPr bwMode="auto">
+          <a:xfrm>
+            <a:off x="3308350" y="3936808"/>
+            <a:ext cx="5575300" cy="1816100"/>
+          </a:xfrm>
+          <a:prstGeom prst="rect">
+            <a:avLst/>
+          </a:prstGeom>
+          <a:noFill/>
+          <a:extLst>
+            <a:ext uri="{909E8E84-426E-40DD-AFC4-6F175D3DCCD1}">
+              <a14:hiddenFill xmlns:a14="http://schemas.microsoft.com/office/drawing/2010/main">
+                <a:solidFill>
+                  <a:srgbClr val="FFFFFF"/>
+                </a:solidFill>
+              </a14:hiddenFill>
+            </a:ext>
+          </a:extLst>
+        </p:spPr>
+      </p:pic>
     </p:spTree>
     <p:extLst>
       <p:ext uri="{BB962C8B-B14F-4D97-AF65-F5344CB8AC3E}">
@@ -12731,713 +15203,42 @@
           <a:chExt cx="0" cy="0"/>
         </a:xfrm>
       </p:grpSpPr>
-      <p:sp>
-        <p:nvSpPr>
-          <p:cNvPr id="2" name="Titel 1">
+      <p:pic>
+        <p:nvPicPr>
+          <p:cNvPr id="6" name="Grafik 5">
             <a:extLst>
               <a:ext uri="{FF2B5EF4-FFF2-40B4-BE49-F238E27FC236}">
-                <a16:creationId xmlns:a16="http://schemas.microsoft.com/office/drawing/2014/main" id="{42B91EC6-C399-4C32-4F81-94CF710485FD}"/>
+                <a16:creationId xmlns:a16="http://schemas.microsoft.com/office/drawing/2014/main" id="{C5E18F3F-566F-63AB-10BA-F619E5370806}"/>
               </a:ext>
             </a:extLst>
           </p:cNvPr>
-          <p:cNvSpPr>
-            <a:spLocks noGrp="1"/>
-          </p:cNvSpPr>
-          <p:nvPr>
-            <p:ph type="title"/>
-          </p:nvPr>
-        </p:nvSpPr>
-        <p:spPr/>
-        <p:txBody>
-          <a:bodyPr/>
-          <a:lstStyle/>
-          <a:p>
-            <a:r>
-              <a:rPr lang="de-DE" dirty="0"/>
-              <a:t>Modern Control Architecture</a:t>
-            </a:r>
-          </a:p>
-        </p:txBody>
-      </p:sp>
-      <mc:AlternateContent xmlns:mc="http://schemas.openxmlformats.org/markup-compatibility/2006">
-        <mc:Choice xmlns:a14="http://schemas.microsoft.com/office/drawing/2010/main" Requires="a14">
-          <p:sp>
-            <p:nvSpPr>
-              <p:cNvPr id="3" name="Inhaltsplatzhalter 2">
-                <a:extLst>
-                  <a:ext uri="{FF2B5EF4-FFF2-40B4-BE49-F238E27FC236}">
-                    <a16:creationId xmlns:a16="http://schemas.microsoft.com/office/drawing/2014/main" id="{D7E03F4E-CFC7-E5BC-77B0-795FD078B7E2}"/>
-                  </a:ext>
-                </a:extLst>
-              </p:cNvPr>
-              <p:cNvSpPr>
-                <a:spLocks noGrp="1"/>
-              </p:cNvSpPr>
-              <p:nvPr>
-                <p:ph idx="1"/>
-              </p:nvPr>
-            </p:nvSpPr>
-            <p:spPr/>
-            <p:txBody>
-              <a:bodyPr>
-                <a:normAutofit/>
-              </a:bodyPr>
-              <a:lstStyle/>
-              <a:p>
-                <a:r>
-                  <a:rPr lang="de-DE" sz="2400" dirty="0"/>
-                  <a:t>State </a:t>
-                </a:r>
-                <a:r>
-                  <a:rPr lang="de-DE" sz="2400" dirty="0" err="1"/>
-                  <a:t>feedback</a:t>
-                </a:r>
-                <a:r>
-                  <a:rPr lang="de-DE" sz="2400" dirty="0"/>
-                  <a:t> (LQR): </a:t>
-                </a:r>
-                <a:r>
-                  <a:rPr lang="de-DE" sz="2400" dirty="0" err="1"/>
-                  <a:t>computes</a:t>
-                </a:r>
-                <a:r>
-                  <a:rPr lang="de-DE" sz="2400" dirty="0"/>
-                  <a:t> optimal </a:t>
-                </a:r>
-                <a:r>
-                  <a:rPr lang="de-DE" sz="2400" dirty="0" err="1"/>
-                  <a:t>control</a:t>
-                </a:r>
-                <a:r>
-                  <a:rPr lang="de-DE" sz="2400" dirty="0"/>
-                  <a:t> </a:t>
-                </a:r>
-                <a:r>
-                  <a:rPr lang="de-DE" sz="2400" dirty="0" err="1"/>
-                  <a:t>input</a:t>
-                </a:r>
-                <a:endParaRPr lang="de-DE" sz="2400" dirty="0"/>
-              </a:p>
-              <a:p>
-                <a:r>
-                  <a:rPr lang="de-DE" sz="2400" dirty="0"/>
-                  <a:t>Kalman </a:t>
-                </a:r>
-                <a:r>
-                  <a:rPr lang="de-DE" sz="2400" dirty="0" err="1"/>
-                  <a:t>filter</a:t>
-                </a:r>
-                <a:r>
-                  <a:rPr lang="de-DE" sz="2400" dirty="0"/>
-                  <a:t> (</a:t>
-                </a:r>
-                <a:r>
-                  <a:rPr lang="de-DE" sz="2400" dirty="0" err="1"/>
-                  <a:t>observer</a:t>
-                </a:r>
-                <a:r>
-                  <a:rPr lang="de-DE" sz="2400" dirty="0"/>
-                  <a:t>): </a:t>
-                </a:r>
-                <a:r>
-                  <a:rPr lang="de-DE" sz="2400" dirty="0" err="1"/>
-                  <a:t>estimates</a:t>
-                </a:r>
-                <a:r>
-                  <a:rPr lang="de-DE" sz="2400" dirty="0"/>
-                  <a:t> </a:t>
-                </a:r>
-                <a:r>
-                  <a:rPr lang="de-DE" sz="2400" dirty="0" err="1"/>
-                  <a:t>system</a:t>
-                </a:r>
-                <a:r>
-                  <a:rPr lang="de-DE" sz="2400" dirty="0"/>
-                  <a:t> </a:t>
-                </a:r>
-                <a:r>
-                  <a:rPr lang="de-DE" sz="2400" dirty="0" err="1"/>
-                  <a:t>state</a:t>
-                </a:r>
-                <a:r>
-                  <a:rPr lang="de-DE" sz="2400" dirty="0"/>
-                  <a:t> </a:t>
-                </a:r>
-                <a:r>
-                  <a:rPr lang="de-DE" sz="2400" dirty="0" err="1"/>
-                  <a:t>from</a:t>
-                </a:r>
-                <a:r>
-                  <a:rPr lang="de-DE" sz="2400" dirty="0"/>
-                  <a:t> </a:t>
-                </a:r>
-                <a:r>
-                  <a:rPr lang="de-DE" sz="2400" dirty="0" err="1"/>
-                  <a:t>noisy</a:t>
-                </a:r>
-                <a:r>
-                  <a:rPr lang="de-DE" sz="2400" dirty="0"/>
-                  <a:t> </a:t>
-                </a:r>
-                <a:r>
-                  <a:rPr lang="de-DE" sz="2400" dirty="0" err="1"/>
-                  <a:t>measurements</a:t>
-                </a:r>
-                <a:endParaRPr lang="de-DE" sz="2400" dirty="0"/>
-              </a:p>
-              <a:p>
-                <a:r>
-                  <a:rPr lang="de-DE" sz="2400" dirty="0" err="1"/>
-                  <a:t>Structure</a:t>
-                </a:r>
-                <a:r>
-                  <a:rPr lang="de-DE" sz="2400" dirty="0"/>
-                  <a:t>: plant (</a:t>
-                </a:r>
-                <a:r>
-                  <a:rPr lang="de-DE" sz="2400" dirty="0" err="1"/>
-                  <a:t>system</a:t>
-                </a:r>
-                <a:r>
-                  <a:rPr lang="de-DE" sz="2400" dirty="0"/>
-                  <a:t>), </a:t>
-                </a:r>
-                <a:r>
-                  <a:rPr lang="de-DE" sz="2400" dirty="0" err="1"/>
-                  <a:t>observer</a:t>
-                </a:r>
-                <a:r>
-                  <a:rPr lang="de-DE" sz="2400" dirty="0"/>
-                  <a:t> (</a:t>
-                </a:r>
-                <a:r>
-                  <a:rPr lang="de-DE" sz="2400" dirty="0" err="1"/>
-                  <a:t>state</a:t>
-                </a:r>
-                <a:r>
-                  <a:rPr lang="de-DE" sz="2400" dirty="0"/>
-                  <a:t> </a:t>
-                </a:r>
-                <a:r>
-                  <a:rPr lang="de-DE" sz="2400" dirty="0" err="1"/>
-                  <a:t>estimation</a:t>
-                </a:r>
-                <a:r>
-                  <a:rPr lang="de-DE" sz="2400" dirty="0"/>
-                  <a:t>), </a:t>
-                </a:r>
-                <a:r>
-                  <a:rPr lang="de-DE" sz="2400" dirty="0" err="1"/>
-                  <a:t>feedback</a:t>
-                </a:r>
-                <a:r>
-                  <a:rPr lang="de-DE" sz="2400" dirty="0"/>
-                  <a:t> </a:t>
-                </a:r>
-                <a:r>
-                  <a:rPr lang="de-DE" sz="2400" dirty="0" err="1"/>
-                  <a:t>controller</a:t>
-                </a:r>
-                <a:endParaRPr lang="de-DE" sz="2400" dirty="0"/>
-              </a:p>
-              <a:p>
-                <a:r>
-                  <a:rPr lang="de-DE" sz="2400" dirty="0"/>
-                  <a:t>Signal </a:t>
-                </a:r>
-                <a:r>
-                  <a:rPr lang="de-DE" sz="2400" dirty="0" err="1"/>
-                  <a:t>flow</a:t>
-                </a:r>
-                <a:r>
-                  <a:rPr lang="de-DE" sz="2400" dirty="0"/>
-                  <a:t>: </a:t>
-                </a:r>
-                <a14:m>
-                  <m:oMath xmlns:m="http://schemas.openxmlformats.org/officeDocument/2006/math">
-                    <m:r>
-                      <a:rPr lang="de-DE" sz="2400" b="0" i="1" smtClean="0">
-                        <a:latin typeface="Cambria Math" panose="02040503050406030204" pitchFamily="18" charset="0"/>
-                        <a:ea typeface="Cambria Math" panose="02040503050406030204" pitchFamily="18" charset="0"/>
-                      </a:rPr>
-                      <m:t>𝑦</m:t>
-                    </m:r>
-                    <m:r>
-                      <a:rPr lang="de-DE" sz="2400" i="1">
-                        <a:latin typeface="Cambria Math" panose="02040503050406030204" pitchFamily="18" charset="0"/>
-                        <a:ea typeface="Cambria Math" panose="02040503050406030204" pitchFamily="18" charset="0"/>
-                      </a:rPr>
-                      <m:t>(</m:t>
-                    </m:r>
-                    <m:r>
-                      <a:rPr lang="de-DE" sz="2400" i="1">
-                        <a:latin typeface="Cambria Math" panose="02040503050406030204" pitchFamily="18" charset="0"/>
-                        <a:ea typeface="Cambria Math" panose="02040503050406030204" pitchFamily="18" charset="0"/>
-                      </a:rPr>
-                      <m:t>𝑡</m:t>
-                    </m:r>
-                    <m:r>
-                      <a:rPr lang="de-DE" sz="2400" i="1">
-                        <a:latin typeface="Cambria Math" panose="02040503050406030204" pitchFamily="18" charset="0"/>
-                        <a:ea typeface="Cambria Math" panose="02040503050406030204" pitchFamily="18" charset="0"/>
-                      </a:rPr>
-                      <m:t>)</m:t>
-                    </m:r>
-                  </m:oMath>
-                </a14:m>
-                <a:r>
-                  <a:rPr lang="de-DE" sz="2400" dirty="0"/>
-                  <a:t> </a:t>
-                </a:r>
-                <a:r>
-                  <a:rPr lang="de-DE" sz="2400" dirty="0">
-                    <a:sym typeface="Wingdings" pitchFamily="2" charset="2"/>
-                  </a:rPr>
-                  <a:t> </a:t>
-                </a:r>
-                <a:r>
-                  <a:rPr lang="de-DE" sz="2400" dirty="0"/>
-                  <a:t>Kalman </a:t>
-                </a:r>
-                <a:r>
-                  <a:rPr lang="de-DE" sz="2400" dirty="0" err="1"/>
-                  <a:t>filter</a:t>
-                </a:r>
-                <a:r>
-                  <a:rPr lang="de-DE" sz="2400" dirty="0"/>
-                  <a:t> </a:t>
-                </a:r>
-                <a:r>
-                  <a:rPr lang="de-DE" sz="2400" dirty="0">
-                    <a:sym typeface="Wingdings" pitchFamily="2" charset="2"/>
-                  </a:rPr>
-                  <a:t> </a:t>
-                </a:r>
-                <a14:m>
-                  <m:oMath xmlns:m="http://schemas.openxmlformats.org/officeDocument/2006/math">
-                    <m:acc>
-                      <m:accPr>
-                        <m:chr m:val="̂"/>
-                        <m:ctrlPr>
-                          <a:rPr lang="de-DE" sz="2400" i="1">
-                            <a:latin typeface="Cambria Math" panose="02040503050406030204" pitchFamily="18" charset="0"/>
-                          </a:rPr>
-                        </m:ctrlPr>
-                      </m:accPr>
-                      <m:e>
-                        <m:r>
-                          <a:rPr lang="de-DE" sz="2400" i="1">
-                            <a:latin typeface="Cambria Math" panose="02040503050406030204" pitchFamily="18" charset="0"/>
-                          </a:rPr>
-                          <m:t>𝑥</m:t>
-                        </m:r>
-                      </m:e>
-                    </m:acc>
-                    <m:d>
-                      <m:dPr>
-                        <m:ctrlPr>
-                          <a:rPr lang="de-DE" sz="2400" b="0" i="1" smtClean="0">
-                            <a:latin typeface="Cambria Math" panose="02040503050406030204" pitchFamily="18" charset="0"/>
-                          </a:rPr>
-                        </m:ctrlPr>
-                      </m:dPr>
-                      <m:e>
-                        <m:r>
-                          <a:rPr lang="de-DE" sz="2400" b="0" i="1" smtClean="0">
-                            <a:latin typeface="Cambria Math" panose="02040503050406030204" pitchFamily="18" charset="0"/>
-                          </a:rPr>
-                          <m:t>𝑡</m:t>
-                        </m:r>
-                      </m:e>
-                    </m:d>
-                  </m:oMath>
-                </a14:m>
-                <a:r>
-                  <a:rPr lang="de-DE" sz="2400" dirty="0"/>
-                  <a:t> </a:t>
-                </a:r>
-                <a:r>
-                  <a:rPr lang="de-DE" sz="2400" dirty="0">
-                    <a:sym typeface="Wingdings" pitchFamily="2" charset="2"/>
-                  </a:rPr>
-                  <a:t> </a:t>
-                </a:r>
-                <a:r>
-                  <a:rPr lang="de-DE" sz="2400" dirty="0"/>
-                  <a:t>LQR </a:t>
-                </a:r>
-                <a:r>
-                  <a:rPr lang="de-DE" sz="2400" dirty="0" err="1"/>
-                  <a:t>controller</a:t>
-                </a:r>
-                <a:r>
-                  <a:rPr lang="de-DE" sz="2400" dirty="0"/>
-                  <a:t> </a:t>
-                </a:r>
-                <a:r>
-                  <a:rPr lang="de-DE" sz="2400" dirty="0">
-                    <a:sym typeface="Wingdings" pitchFamily="2" charset="2"/>
-                  </a:rPr>
-                  <a:t></a:t>
-                </a:r>
-                <a:r>
-                  <a:rPr lang="de-DE" sz="2400" dirty="0"/>
-                  <a:t> </a:t>
-                </a:r>
-                <a14:m>
-                  <m:oMath xmlns:m="http://schemas.openxmlformats.org/officeDocument/2006/math">
-                    <m:r>
-                      <a:rPr lang="de-DE" sz="2400" b="0" i="1" smtClean="0">
-                        <a:latin typeface="Cambria Math" panose="02040503050406030204" pitchFamily="18" charset="0"/>
-                        <a:ea typeface="Cambria Math" panose="02040503050406030204" pitchFamily="18" charset="0"/>
-                      </a:rPr>
-                      <m:t>𝑢</m:t>
-                    </m:r>
-                    <m:r>
-                      <a:rPr lang="de-DE" sz="2400" i="1">
-                        <a:latin typeface="Cambria Math" panose="02040503050406030204" pitchFamily="18" charset="0"/>
-                        <a:ea typeface="Cambria Math" panose="02040503050406030204" pitchFamily="18" charset="0"/>
-                      </a:rPr>
-                      <m:t>(</m:t>
-                    </m:r>
-                    <m:r>
-                      <a:rPr lang="de-DE" sz="2400" i="1">
-                        <a:latin typeface="Cambria Math" panose="02040503050406030204" pitchFamily="18" charset="0"/>
-                        <a:ea typeface="Cambria Math" panose="02040503050406030204" pitchFamily="18" charset="0"/>
-                      </a:rPr>
-                      <m:t>𝑡</m:t>
-                    </m:r>
-                    <m:r>
-                      <a:rPr lang="de-DE" sz="2400" i="1">
-                        <a:latin typeface="Cambria Math" panose="02040503050406030204" pitchFamily="18" charset="0"/>
-                        <a:ea typeface="Cambria Math" panose="02040503050406030204" pitchFamily="18" charset="0"/>
-                      </a:rPr>
-                      <m:t>)</m:t>
-                    </m:r>
-                  </m:oMath>
-                </a14:m>
-                <a:r>
-                  <a:rPr lang="de-DE" sz="2400" dirty="0"/>
-                  <a:t> </a:t>
-                </a:r>
-                <a:r>
-                  <a:rPr lang="de-DE" sz="2400" dirty="0">
-                    <a:sym typeface="Wingdings" pitchFamily="2" charset="2"/>
-                  </a:rPr>
-                  <a:t> </a:t>
-                </a:r>
-                <a:r>
-                  <a:rPr lang="de-DE" sz="2400" dirty="0" err="1">
-                    <a:sym typeface="Wingdings" pitchFamily="2" charset="2"/>
-                  </a:rPr>
-                  <a:t>s</a:t>
-                </a:r>
-                <a:r>
-                  <a:rPr lang="de-DE" sz="2400" dirty="0" err="1"/>
-                  <a:t>ystem</a:t>
-                </a:r>
-                <a:endParaRPr lang="de-DE" sz="2400" dirty="0"/>
-              </a:p>
-              <a:p>
-                <a:r>
-                  <a:rPr lang="de-DE" sz="2400" dirty="0"/>
-                  <a:t>Separation </a:t>
-                </a:r>
-                <a:r>
-                  <a:rPr lang="de-DE" sz="2400" dirty="0" err="1"/>
-                  <a:t>principle</a:t>
-                </a:r>
-                <a:r>
-                  <a:rPr lang="de-DE" sz="2400" dirty="0"/>
-                  <a:t>: </a:t>
-                </a:r>
-                <a:r>
-                  <a:rPr lang="de-DE" sz="2400" dirty="0" err="1"/>
-                  <a:t>controller</a:t>
-                </a:r>
-                <a:r>
-                  <a:rPr lang="de-DE" sz="2400" dirty="0"/>
-                  <a:t> design (LQR) and </a:t>
-                </a:r>
-                <a:r>
-                  <a:rPr lang="de-DE" sz="2400" dirty="0" err="1"/>
-                  <a:t>estimator</a:t>
-                </a:r>
-                <a:r>
-                  <a:rPr lang="de-DE" sz="2400" dirty="0"/>
-                  <a:t> design (Kalman) </a:t>
-                </a:r>
-                <a:r>
-                  <a:rPr lang="de-DE" sz="2400" dirty="0" err="1"/>
-                  <a:t>can</a:t>
-                </a:r>
-                <a:r>
-                  <a:rPr lang="de-DE" sz="2400" dirty="0"/>
-                  <a:t> </a:t>
-                </a:r>
-                <a:r>
-                  <a:rPr lang="de-DE" sz="2400" dirty="0" err="1"/>
-                  <a:t>be</a:t>
-                </a:r>
-                <a:r>
-                  <a:rPr lang="de-DE" sz="2400" dirty="0"/>
-                  <a:t> </a:t>
-                </a:r>
-                <a:r>
-                  <a:rPr lang="de-DE" sz="2400" dirty="0" err="1"/>
-                  <a:t>done</a:t>
-                </a:r>
-                <a:r>
-                  <a:rPr lang="de-DE" sz="2400" dirty="0"/>
-                  <a:t> </a:t>
-                </a:r>
-                <a:r>
-                  <a:rPr lang="de-DE" sz="2400" dirty="0" err="1"/>
-                  <a:t>independently</a:t>
-                </a:r>
-                <a:endParaRPr lang="de-DE" sz="2400" dirty="0"/>
-              </a:p>
-              <a:p>
-                <a:pPr marL="0" indent="0">
-                  <a:buNone/>
-                </a:pPr>
-                <a:r>
-                  <a:rPr lang="de-DE" sz="2400" dirty="0">
-                    <a:sym typeface="Wingdings" pitchFamily="2" charset="2"/>
-                  </a:rPr>
-                  <a:t></a:t>
-                </a:r>
-                <a:r>
-                  <a:rPr lang="de-DE" sz="2400" dirty="0"/>
-                  <a:t> Linear </a:t>
-                </a:r>
-                <a:r>
-                  <a:rPr lang="de-DE" sz="2400" dirty="0" err="1"/>
-                  <a:t>Quadratic</a:t>
-                </a:r>
-                <a:r>
-                  <a:rPr lang="de-DE" sz="2400" dirty="0"/>
-                  <a:t> </a:t>
-                </a:r>
-                <a:r>
-                  <a:rPr lang="de-DE" sz="2400" dirty="0" err="1"/>
-                  <a:t>Gaussian</a:t>
-                </a:r>
-                <a:r>
-                  <a:rPr lang="de-DE" sz="2400" dirty="0"/>
-                  <a:t> (LQG) </a:t>
-                </a:r>
-                <a:r>
-                  <a:rPr lang="de-DE" sz="2400" dirty="0" err="1"/>
-                  <a:t>control</a:t>
-                </a:r>
-                <a:endParaRPr lang="de-DE" sz="2400" dirty="0"/>
-              </a:p>
-              <a:p>
-                <a:pPr lvl="1"/>
-                <a:r>
-                  <a:rPr lang="de-DE" dirty="0"/>
-                  <a:t>Optimal </a:t>
-                </a:r>
-                <a:r>
-                  <a:rPr lang="de-DE" dirty="0" err="1"/>
-                  <a:t>control</a:t>
-                </a:r>
-                <a:r>
-                  <a:rPr lang="de-DE" dirty="0"/>
-                  <a:t> (LQR) + optimal </a:t>
-                </a:r>
-                <a:r>
-                  <a:rPr lang="de-DE" dirty="0" err="1"/>
-                  <a:t>estimation</a:t>
-                </a:r>
-                <a:r>
-                  <a:rPr lang="de-DE" dirty="0"/>
-                  <a:t> (Kalman)</a:t>
-                </a:r>
-              </a:p>
-              <a:p>
-                <a:pPr lvl="1"/>
-                <a:r>
-                  <a:rPr lang="de-DE" dirty="0" err="1"/>
-                  <a:t>Foundation</a:t>
-                </a:r>
-                <a:r>
-                  <a:rPr lang="de-DE" dirty="0"/>
-                  <a:t> </a:t>
-                </a:r>
-                <a:r>
-                  <a:rPr lang="de-DE" dirty="0" err="1"/>
-                  <a:t>of</a:t>
-                </a:r>
-                <a:r>
-                  <a:rPr lang="de-DE" dirty="0"/>
-                  <a:t> modern </a:t>
-                </a:r>
-                <a:r>
-                  <a:rPr lang="de-DE" dirty="0" err="1"/>
-                  <a:t>control</a:t>
-                </a:r>
-                <a:r>
-                  <a:rPr lang="de-DE" dirty="0"/>
-                  <a:t> </a:t>
-                </a:r>
-                <a:r>
-                  <a:rPr lang="de-DE" dirty="0" err="1"/>
-                  <a:t>systems</a:t>
-                </a:r>
-                <a:r>
-                  <a:rPr lang="de-DE" dirty="0"/>
-                  <a:t>: </a:t>
-                </a:r>
-                <a:r>
-                  <a:rPr lang="de-DE" dirty="0" err="1"/>
-                  <a:t>used</a:t>
-                </a:r>
-                <a:r>
-                  <a:rPr lang="de-DE" dirty="0"/>
-                  <a:t> in </a:t>
-                </a:r>
-                <a:r>
-                  <a:rPr lang="de-DE" dirty="0" err="1"/>
-                  <a:t>aerospace</a:t>
-                </a:r>
-                <a:r>
-                  <a:rPr lang="de-DE" dirty="0"/>
-                  <a:t>, </a:t>
-                </a:r>
-                <a:r>
-                  <a:rPr lang="de-DE" dirty="0" err="1"/>
-                  <a:t>robotics</a:t>
-                </a:r>
-                <a:r>
-                  <a:rPr lang="de-DE" dirty="0"/>
-                  <a:t>, </a:t>
-                </a:r>
-                <a:r>
-                  <a:rPr lang="de-DE" dirty="0" err="1"/>
-                  <a:t>automotive</a:t>
-                </a:r>
-                <a:r>
-                  <a:rPr lang="de-DE" dirty="0"/>
-                  <a:t>, </a:t>
-                </a:r>
-                <a:r>
-                  <a:rPr lang="de-DE" dirty="0" err="1"/>
-                  <a:t>process</a:t>
-                </a:r>
-                <a:r>
-                  <a:rPr lang="de-DE" dirty="0"/>
-                  <a:t> </a:t>
-                </a:r>
-                <a:r>
-                  <a:rPr lang="de-DE" dirty="0" err="1"/>
-                  <a:t>control</a:t>
-                </a:r>
-                <a:endParaRPr lang="de-DE" dirty="0"/>
-              </a:p>
-            </p:txBody>
-          </p:sp>
-        </mc:Choice>
-        <mc:Fallback>
-          <p:sp>
-            <p:nvSpPr>
-              <p:cNvPr id="3" name="Inhaltsplatzhalter 2">
-                <a:extLst>
-                  <a:ext uri="{FF2B5EF4-FFF2-40B4-BE49-F238E27FC236}">
-                    <a16:creationId xmlns:a16="http://schemas.microsoft.com/office/drawing/2014/main" id="{D7E03F4E-CFC7-E5BC-77B0-795FD078B7E2}"/>
-                  </a:ext>
-                </a:extLst>
-              </p:cNvPr>
-              <p:cNvSpPr>
-                <a:spLocks noGrp="1" noRot="1" noChangeAspect="1" noMove="1" noResize="1" noEditPoints="1" noAdjustHandles="1" noChangeArrowheads="1" noChangeShapeType="1" noTextEdit="1"/>
-              </p:cNvSpPr>
-              <p:nvPr>
-                <p:ph idx="1"/>
-              </p:nvPr>
-            </p:nvSpPr>
-            <p:spPr>
-              <a:blipFill>
-                <a:blip r:embed="rId2"/>
-                <a:stretch>
-                  <a:fillRect l="-965" t="-2035"/>
-                </a:stretch>
-              </a:blipFill>
-            </p:spPr>
-            <p:txBody>
-              <a:bodyPr/>
-              <a:lstStyle/>
-              <a:p>
-                <a:r>
-                  <a:rPr lang="de-DE">
-                    <a:noFill/>
-                  </a:rPr>
-                  <a:t> </a:t>
-                </a:r>
-              </a:p>
-            </p:txBody>
-          </p:sp>
-        </mc:Fallback>
-      </mc:AlternateContent>
-      <p:sp>
-        <p:nvSpPr>
-          <p:cNvPr id="4" name="Foliennummernplatzhalter 3">
+          <p:cNvPicPr>
+            <a:picLocks noChangeAspect="1"/>
+          </p:cNvPicPr>
+          <p:nvPr/>
+        </p:nvPicPr>
+        <p:blipFill>
+          <a:blip r:embed="rId2">
             <a:extLst>
-              <a:ext uri="{FF2B5EF4-FFF2-40B4-BE49-F238E27FC236}">
-                <a16:creationId xmlns:a16="http://schemas.microsoft.com/office/drawing/2014/main" id="{920FF965-E647-81B4-8073-1C8B62944D7B}"/>
+              <a:ext uri="{28A0092B-C50C-407E-A947-70E740481C1C}">
+                <a14:useLocalDpi xmlns:a14="http://schemas.microsoft.com/office/drawing/2010/main" val="0"/>
               </a:ext>
             </a:extLst>
-          </p:cNvPr>
-          <p:cNvSpPr>
-            <a:spLocks noGrp="1"/>
-          </p:cNvSpPr>
-          <p:nvPr>
-            <p:ph type="sldNum" sz="quarter" idx="12"/>
-          </p:nvPr>
-        </p:nvSpPr>
-        <p:spPr/>
-        <p:txBody>
-          <a:bodyPr/>
-          <a:lstStyle/>
-          <a:p>
-            <a:fld id="{08C366F5-AFAD-49CB-854A-9D9E238FCA13}" type="slidenum">
-              <a:rPr lang="en-GB" smtClean="0"/>
-              <a:t>21</a:t>
-            </a:fld>
-            <a:endParaRPr lang="en-GB"/>
-          </a:p>
-        </p:txBody>
-      </p:sp>
-    </p:spTree>
-    <p:extLst>
-      <p:ext uri="{BB962C8B-B14F-4D97-AF65-F5344CB8AC3E}">
-        <p14:creationId xmlns:p14="http://schemas.microsoft.com/office/powerpoint/2010/main" val="4187681817"/>
-      </p:ext>
-    </p:extLst>
-  </p:cSld>
-  <p:clrMapOvr>
-    <a:masterClrMapping/>
-  </p:clrMapOvr>
-</p:sld>
-</file>
-
-<file path=ppt/slides/slide22.xml><?xml version="1.0" encoding="utf-8"?>
-<p:sld xmlns:a="http://schemas.openxmlformats.org/drawingml/2006/main" xmlns:r="http://schemas.openxmlformats.org/officeDocument/2006/relationships" xmlns:p="http://schemas.openxmlformats.org/presentationml/2006/main">
-  <p:cSld>
-    <p:spTree>
-      <p:nvGrpSpPr>
-        <p:cNvPr id="1" name=""/>
-        <p:cNvGrpSpPr/>
-        <p:nvPr/>
-      </p:nvGrpSpPr>
-      <p:grpSpPr>
-        <a:xfrm>
-          <a:off x="0" y="0"/>
-          <a:ext cx="0" cy="0"/>
-          <a:chOff x="0" y="0"/>
-          <a:chExt cx="0" cy="0"/>
-        </a:xfrm>
-      </p:grpSpPr>
+          </a:blip>
+          <a:stretch>
+            <a:fillRect/>
+          </a:stretch>
+        </p:blipFill>
+        <p:spPr>
+          <a:xfrm>
+            <a:off x="6240864" y="3880778"/>
+            <a:ext cx="5951136" cy="2079596"/>
+          </a:xfrm>
+          <a:prstGeom prst="rect">
+            <a:avLst/>
+          </a:prstGeom>
+        </p:spPr>
+      </p:pic>
       <p:sp>
         <p:nvSpPr>
           <p:cNvPr id="2" name="Titel 1">
@@ -13470,8 +15271,8 @@
           </a:p>
         </p:txBody>
       </p:sp>
-      <mc:AlternateContent xmlns:mc="http://schemas.openxmlformats.org/markup-compatibility/2006">
-        <mc:Choice xmlns:a14="http://schemas.microsoft.com/office/drawing/2010/main" Requires="a14">
+      <mc:AlternateContent xmlns:mc="http://schemas.openxmlformats.org/markup-compatibility/2006" xmlns:a14="http://schemas.microsoft.com/office/drawing/2010/main">
+        <mc:Choice Requires="a14">
           <p:sp>
             <p:nvSpPr>
               <p:cNvPr id="3" name="Inhaltsplatzhalter 2">
@@ -13659,14 +15460,23 @@
                   <a:buNone/>
                 </a:pPr>
                 <a:r>
+                  <a:rPr lang="de-DE" dirty="0" err="1"/>
+                  <a:t>Example</a:t>
+                </a:r>
+                <a:r>
                   <a:rPr lang="de-DE" dirty="0"/>
-                  <a:t>…</a:t>
-                </a:r>
+                  <a:t>: </a:t>
+                </a:r>
+                <a:r>
+                  <a:rPr lang="de-DE" dirty="0" err="1"/>
+                  <a:t>predator-prey</a:t>
+                </a:r>
+                <a:endParaRPr lang="de-DE" dirty="0"/>
               </a:p>
             </p:txBody>
           </p:sp>
         </mc:Choice>
-        <mc:Fallback>
+        <mc:Fallback xmlns="">
           <p:sp>
             <p:nvSpPr>
               <p:cNvPr id="3" name="Inhaltsplatzhalter 2">
@@ -13685,7 +15495,7 @@
             </p:nvSpPr>
             <p:spPr>
               <a:blipFill>
-                <a:blip r:embed="rId2"/>
+                <a:blip r:embed="rId3"/>
                 <a:stretch>
                   <a:fillRect l="-1206" t="-2326"/>
                 </a:stretch>
@@ -13729,12 +15539,48 @@
           <a:p>
             <a:fld id="{08C366F5-AFAD-49CB-854A-9D9E238FCA13}" type="slidenum">
               <a:rPr lang="en-GB" smtClean="0"/>
-              <a:t>22</a:t>
+              <a:t>21</a:t>
             </a:fld>
             <a:endParaRPr lang="en-GB"/>
           </a:p>
         </p:txBody>
       </p:sp>
+      <p:pic>
+        <p:nvPicPr>
+          <p:cNvPr id="5" name="Grafik 4">
+            <a:extLst>
+              <a:ext uri="{FF2B5EF4-FFF2-40B4-BE49-F238E27FC236}">
+                <a16:creationId xmlns:a16="http://schemas.microsoft.com/office/drawing/2014/main" id="{A3125543-8C5D-836B-8E1A-150D10933393}"/>
+              </a:ext>
+            </a:extLst>
+          </p:cNvPr>
+          <p:cNvPicPr>
+            <a:picLocks noChangeAspect="1"/>
+          </p:cNvPicPr>
+          <p:nvPr/>
+        </p:nvPicPr>
+        <p:blipFill>
+          <a:blip r:embed="rId4">
+            <a:extLst>
+              <a:ext uri="{28A0092B-C50C-407E-A947-70E740481C1C}">
+                <a14:useLocalDpi xmlns:a14="http://schemas.microsoft.com/office/drawing/2010/main" val="0"/>
+              </a:ext>
+            </a:extLst>
+          </a:blip>
+          <a:stretch>
+            <a:fillRect/>
+          </a:stretch>
+        </p:blipFill>
+        <p:spPr>
+          <a:xfrm>
+            <a:off x="2" y="3880778"/>
+            <a:ext cx="5951135" cy="1680422"/>
+          </a:xfrm>
+          <a:prstGeom prst="rect">
+            <a:avLst/>
+          </a:prstGeom>
+        </p:spPr>
+      </p:pic>
     </p:spTree>
     <p:extLst>
       <p:ext uri="{BB962C8B-B14F-4D97-AF65-F5344CB8AC3E}">
@@ -13748,206 +15594,7 @@
 </p:sld>
 </file>
 
-<file path=ppt/slides/slide23.xml><?xml version="1.0" encoding="utf-8"?>
-<p:sld xmlns:a="http://schemas.openxmlformats.org/drawingml/2006/main" xmlns:r="http://schemas.openxmlformats.org/officeDocument/2006/relationships" xmlns:p="http://schemas.openxmlformats.org/presentationml/2006/main">
-  <p:cSld>
-    <p:spTree>
-      <p:nvGrpSpPr>
-        <p:cNvPr id="1" name=""/>
-        <p:cNvGrpSpPr/>
-        <p:nvPr/>
-      </p:nvGrpSpPr>
-      <p:grpSpPr>
-        <a:xfrm>
-          <a:off x="0" y="0"/>
-          <a:ext cx="0" cy="0"/>
-          <a:chOff x="0" y="0"/>
-          <a:chExt cx="0" cy="0"/>
-        </a:xfrm>
-      </p:grpSpPr>
-      <p:sp>
-        <p:nvSpPr>
-          <p:cNvPr id="2" name="Titel 1">
-            <a:extLst>
-              <a:ext uri="{FF2B5EF4-FFF2-40B4-BE49-F238E27FC236}">
-                <a16:creationId xmlns:a16="http://schemas.microsoft.com/office/drawing/2014/main" id="{5DA213F5-67B0-7D0D-B1CA-B810BAA54800}"/>
-              </a:ext>
-            </a:extLst>
-          </p:cNvPr>
-          <p:cNvSpPr>
-            <a:spLocks noGrp="1"/>
-          </p:cNvSpPr>
-          <p:nvPr>
-            <p:ph type="title"/>
-          </p:nvPr>
-        </p:nvSpPr>
-        <p:spPr/>
-        <p:txBody>
-          <a:bodyPr/>
-          <a:lstStyle/>
-          <a:p>
-            <a:r>
-              <a:rPr lang="de-DE" dirty="0" err="1"/>
-              <a:t>Example</a:t>
-            </a:r>
-            <a:r>
-              <a:rPr lang="de-DE" dirty="0"/>
-              <a:t>: Predator-Prey</a:t>
-            </a:r>
-          </a:p>
-        </p:txBody>
-      </p:sp>
-      <p:sp>
-        <p:nvSpPr>
-          <p:cNvPr id="3" name="Inhaltsplatzhalter 2">
-            <a:extLst>
-              <a:ext uri="{FF2B5EF4-FFF2-40B4-BE49-F238E27FC236}">
-                <a16:creationId xmlns:a16="http://schemas.microsoft.com/office/drawing/2014/main" id="{5B59F277-BD17-124D-A233-51F12F94BA50}"/>
-              </a:ext>
-            </a:extLst>
-          </p:cNvPr>
-          <p:cNvSpPr>
-            <a:spLocks noGrp="1"/>
-          </p:cNvSpPr>
-          <p:nvPr>
-            <p:ph idx="1"/>
-          </p:nvPr>
-        </p:nvSpPr>
-        <p:spPr>
-          <a:xfrm>
-            <a:off x="838200" y="1825625"/>
-            <a:ext cx="5257800" cy="4351338"/>
-          </a:xfrm>
-        </p:spPr>
-        <p:txBody>
-          <a:bodyPr/>
-          <a:lstStyle/>
-          <a:p>
-            <a:pPr marL="0" indent="0">
-              <a:buNone/>
-            </a:pPr>
-            <a:r>
-              <a:rPr lang="de-DE" dirty="0"/>
-              <a:t>…</a:t>
-            </a:r>
-          </a:p>
-        </p:txBody>
-      </p:sp>
-      <p:sp>
-        <p:nvSpPr>
-          <p:cNvPr id="4" name="Foliennummernplatzhalter 3">
-            <a:extLst>
-              <a:ext uri="{FF2B5EF4-FFF2-40B4-BE49-F238E27FC236}">
-                <a16:creationId xmlns:a16="http://schemas.microsoft.com/office/drawing/2014/main" id="{F1CEB704-35AA-F52A-C164-C1A88C7E165C}"/>
-              </a:ext>
-            </a:extLst>
-          </p:cNvPr>
-          <p:cNvSpPr>
-            <a:spLocks noGrp="1"/>
-          </p:cNvSpPr>
-          <p:nvPr>
-            <p:ph type="sldNum" sz="quarter" idx="12"/>
-          </p:nvPr>
-        </p:nvSpPr>
-        <p:spPr/>
-        <p:txBody>
-          <a:bodyPr/>
-          <a:lstStyle/>
-          <a:p>
-            <a:fld id="{08C366F5-AFAD-49CB-854A-9D9E238FCA13}" type="slidenum">
-              <a:rPr lang="en-GB" smtClean="0"/>
-              <a:t>23</a:t>
-            </a:fld>
-            <a:endParaRPr lang="en-GB"/>
-          </a:p>
-        </p:txBody>
-      </p:sp>
-      <p:pic>
-        <p:nvPicPr>
-          <p:cNvPr id="6" name="Grafik 5">
-            <a:extLst>
-              <a:ext uri="{FF2B5EF4-FFF2-40B4-BE49-F238E27FC236}">
-                <a16:creationId xmlns:a16="http://schemas.microsoft.com/office/drawing/2014/main" id="{D6495AC2-3AF6-8D74-3B5B-C768E1972393}"/>
-              </a:ext>
-            </a:extLst>
-          </p:cNvPr>
-          <p:cNvPicPr>
-            <a:picLocks noChangeAspect="1"/>
-          </p:cNvPicPr>
-          <p:nvPr/>
-        </p:nvPicPr>
-        <p:blipFill>
-          <a:blip r:embed="rId2">
-            <a:extLst>
-              <a:ext uri="{28A0092B-C50C-407E-A947-70E740481C1C}">
-                <a14:useLocalDpi xmlns:a14="http://schemas.microsoft.com/office/drawing/2010/main" val="0"/>
-              </a:ext>
-            </a:extLst>
-          </a:blip>
-          <a:stretch>
-            <a:fillRect/>
-          </a:stretch>
-        </p:blipFill>
-        <p:spPr>
-          <a:xfrm>
-            <a:off x="6096000" y="2012854"/>
-            <a:ext cx="5951135" cy="1680422"/>
-          </a:xfrm>
-          <a:prstGeom prst="rect">
-            <a:avLst/>
-          </a:prstGeom>
-        </p:spPr>
-      </p:pic>
-      <p:pic>
-        <p:nvPicPr>
-          <p:cNvPr id="8" name="Grafik 7">
-            <a:extLst>
-              <a:ext uri="{FF2B5EF4-FFF2-40B4-BE49-F238E27FC236}">
-                <a16:creationId xmlns:a16="http://schemas.microsoft.com/office/drawing/2014/main" id="{9663C20C-EF56-0440-B05B-9FDD0CA3B82B}"/>
-              </a:ext>
-            </a:extLst>
-          </p:cNvPr>
-          <p:cNvPicPr>
-            <a:picLocks noChangeAspect="1"/>
-          </p:cNvPicPr>
-          <p:nvPr/>
-        </p:nvPicPr>
-        <p:blipFill>
-          <a:blip r:embed="rId3">
-            <a:extLst>
-              <a:ext uri="{28A0092B-C50C-407E-A947-70E740481C1C}">
-                <a14:useLocalDpi xmlns:a14="http://schemas.microsoft.com/office/drawing/2010/main" val="0"/>
-              </a:ext>
-            </a:extLst>
-          </a:blip>
-          <a:stretch>
-            <a:fillRect/>
-          </a:stretch>
-        </p:blipFill>
-        <p:spPr>
-          <a:xfrm>
-            <a:off x="6096000" y="4304435"/>
-            <a:ext cx="5951136" cy="2079596"/>
-          </a:xfrm>
-          <a:prstGeom prst="rect">
-            <a:avLst/>
-          </a:prstGeom>
-        </p:spPr>
-      </p:pic>
-    </p:spTree>
-    <p:extLst>
-      <p:ext uri="{BB962C8B-B14F-4D97-AF65-F5344CB8AC3E}">
-        <p14:creationId xmlns:p14="http://schemas.microsoft.com/office/powerpoint/2010/main" val="188745570"/>
-      </p:ext>
-    </p:extLst>
-  </p:cSld>
-  <p:clrMapOvr>
-    <a:masterClrMapping/>
-  </p:clrMapOvr>
-</p:sld>
-</file>
-
-<file path=ppt/slides/slide24.xml><?xml version="1.0" encoding="utf-8"?>
+<file path=ppt/slides/slide22.xml><?xml version="1.0" encoding="utf-8"?>
 <p:sld xmlns:a="http://schemas.openxmlformats.org/drawingml/2006/main" xmlns:r="http://schemas.openxmlformats.org/officeDocument/2006/relationships" xmlns:p="http://schemas.openxmlformats.org/presentationml/2006/main">
   <p:cSld>
     <p:spTree>
@@ -14099,7 +15746,17 @@
             </a:r>
             <a:r>
               <a:rPr lang="de-DE" dirty="0"/>
-              <a:t> → </a:t>
+              <a:t> </a:t>
+            </a:r>
+            <a:r>
+              <a:rPr lang="de-DE" dirty="0">
+                <a:sym typeface="Wingdings" pitchFamily="2" charset="2"/>
+              </a:rPr>
+              <a:t></a:t>
+            </a:r>
+            <a:r>
+              <a:rPr lang="de-DE" dirty="0"/>
+              <a:t> </a:t>
             </a:r>
             <a:r>
               <a:rPr lang="de-DE" dirty="0" err="1"/>
@@ -14118,7 +15775,17 @@
           <a:p>
             <a:r>
               <a:rPr lang="de-DE" dirty="0"/>
-              <a:t>LQR &amp; Kalman → optimal design</a:t>
+              <a:t>LQR &amp; Kalman </a:t>
+            </a:r>
+            <a:r>
+              <a:rPr lang="de-DE" dirty="0">
+                <a:sym typeface="Wingdings" pitchFamily="2" charset="2"/>
+              </a:rPr>
+              <a:t></a:t>
+            </a:r>
+            <a:r>
+              <a:rPr lang="de-DE" dirty="0"/>
+              <a:t> optimal design</a:t>
             </a:r>
           </a:p>
         </p:txBody>
@@ -14146,7 +15813,7 @@
           <a:p>
             <a:fld id="{08C366F5-AFAD-49CB-854A-9D9E238FCA13}" type="slidenum">
               <a:rPr lang="en-GB" smtClean="0"/>
-              <a:t>24</a:t>
+              <a:t>22</a:t>
             </a:fld>
             <a:endParaRPr lang="en-GB"/>
           </a:p>
@@ -19586,8 +21253,8 @@
           </a:p>
         </p:txBody>
       </p:sp>
-      <mc:AlternateContent xmlns:mc="http://schemas.openxmlformats.org/markup-compatibility/2006">
-        <mc:Choice xmlns:a14="http://schemas.microsoft.com/office/drawing/2010/main" Requires="a14">
+      <mc:AlternateContent xmlns:mc="http://schemas.openxmlformats.org/markup-compatibility/2006" xmlns:a14="http://schemas.microsoft.com/office/drawing/2010/main">
+        <mc:Choice Requires="a14">
           <p:sp>
             <p:nvSpPr>
               <p:cNvPr id="3" name="Inhaltsplatzhalter 2">
@@ -20831,7 +22498,7 @@
             </p:txBody>
           </p:sp>
         </mc:Choice>
-        <mc:Fallback>
+        <mc:Fallback xmlns="">
           <p:sp>
             <p:nvSpPr>
               <p:cNvPr id="3" name="Inhaltsplatzhalter 2">

--- a/slides/7_state_space.pptx
+++ b/slides/7_state_space.pptx
@@ -500,7 +500,7 @@
           <a:p>
             <a:fld id="{506E0FD1-891F-4B1E-916D-E9B585160BB8}" type="datetimeFigureOut">
               <a:rPr lang="en-GB" smtClean="0"/>
-              <a:t>05/04/2026</a:t>
+              <a:t>19/05/2026</a:t>
             </a:fld>
             <a:endParaRPr lang="en-GB"/>
           </a:p>
@@ -917,7 +917,7 @@
           <a:p>
             <a:fld id="{D68C3F22-27B2-44E3-9C5F-D08126455F6F}" type="datetime1">
               <a:rPr lang="en-GB" smtClean="0"/>
-              <a:t>05/04/2026</a:t>
+              <a:t>19/05/2026</a:t>
             </a:fld>
             <a:endParaRPr lang="en-GB"/>
           </a:p>
@@ -1117,7 +1117,7 @@
           <a:p>
             <a:fld id="{1CD03846-7BF6-4FB6-A921-FF3379ADBD4C}" type="datetime1">
               <a:rPr lang="en-GB" smtClean="0"/>
-              <a:t>05/04/2026</a:t>
+              <a:t>19/05/2026</a:t>
             </a:fld>
             <a:endParaRPr lang="en-GB"/>
           </a:p>
@@ -1327,7 +1327,7 @@
           <a:p>
             <a:fld id="{99E1B91A-3FD0-4144-9C84-63E9688ED2FE}" type="datetime1">
               <a:rPr lang="en-GB" smtClean="0"/>
-              <a:t>05/04/2026</a:t>
+              <a:t>19/05/2026</a:t>
             </a:fld>
             <a:endParaRPr lang="en-GB"/>
           </a:p>
@@ -1527,7 +1527,7 @@
           <a:p>
             <a:fld id="{5295ED7B-FEAD-4734-819F-93EF4B0EA908}" type="datetime1">
               <a:rPr lang="en-GB" smtClean="0"/>
-              <a:t>05/04/2026</a:t>
+              <a:t>19/05/2026</a:t>
             </a:fld>
             <a:endParaRPr lang="en-GB"/>
           </a:p>
@@ -1803,7 +1803,7 @@
           <a:p>
             <a:fld id="{D2D5D4B4-C926-4B45-8815-1ED8911179A2}" type="datetime1">
               <a:rPr lang="en-GB" smtClean="0"/>
-              <a:t>05/04/2026</a:t>
+              <a:t>19/05/2026</a:t>
             </a:fld>
             <a:endParaRPr lang="en-GB"/>
           </a:p>
@@ -2071,7 +2071,7 @@
           <a:p>
             <a:fld id="{B4C5210A-0E37-4935-93AF-69F21A5F712F}" type="datetime1">
               <a:rPr lang="en-GB" smtClean="0"/>
-              <a:t>05/04/2026</a:t>
+              <a:t>19/05/2026</a:t>
             </a:fld>
             <a:endParaRPr lang="en-GB"/>
           </a:p>
@@ -2486,7 +2486,7 @@
           <a:p>
             <a:fld id="{3D3A6B2F-436C-4691-80E8-9C890E000E9D}" type="datetime1">
               <a:rPr lang="en-GB" smtClean="0"/>
-              <a:t>05/04/2026</a:t>
+              <a:t>19/05/2026</a:t>
             </a:fld>
             <a:endParaRPr lang="en-GB"/>
           </a:p>
@@ -2628,7 +2628,7 @@
           <a:p>
             <a:fld id="{84385F4C-D74B-496F-8D21-97E3549C783B}" type="datetime1">
               <a:rPr lang="en-GB" smtClean="0"/>
-              <a:t>05/04/2026</a:t>
+              <a:t>19/05/2026</a:t>
             </a:fld>
             <a:endParaRPr lang="en-GB"/>
           </a:p>
@@ -2741,7 +2741,7 @@
           <a:p>
             <a:fld id="{0CBDCB32-C241-4703-A832-4EB47BD54E83}" type="datetime1">
               <a:rPr lang="en-GB" smtClean="0"/>
-              <a:t>05/04/2026</a:t>
+              <a:t>19/05/2026</a:t>
             </a:fld>
             <a:endParaRPr lang="en-GB"/>
           </a:p>
@@ -3054,7 +3054,7 @@
           <a:p>
             <a:fld id="{85C150FF-BE95-4D25-A16A-E368A81CBF24}" type="datetime1">
               <a:rPr lang="en-GB" smtClean="0"/>
-              <a:t>05/04/2026</a:t>
+              <a:t>19/05/2026</a:t>
             </a:fld>
             <a:endParaRPr lang="en-GB"/>
           </a:p>
@@ -3343,7 +3343,7 @@
           <a:p>
             <a:fld id="{F3C5DB4B-B349-43C9-A424-BADA723AD9F1}" type="datetime1">
               <a:rPr lang="en-GB" smtClean="0"/>
-              <a:t>05/04/2026</a:t>
+              <a:t>19/05/2026</a:t>
             </a:fld>
             <a:endParaRPr lang="en-GB"/>
           </a:p>
@@ -3586,7 +3586,7 @@
           <a:p>
             <a:fld id="{12632426-0A0C-405F-A3D0-2D11AA44702A}" type="datetime1">
               <a:rPr lang="en-GB" smtClean="0"/>
-              <a:t>05/04/2026</a:t>
+              <a:t>19/05/2026</a:t>
             </a:fld>
             <a:endParaRPr lang="en-GB"/>
           </a:p>
@@ -8031,8 +8031,8 @@
           </a:p>
         </p:txBody>
       </p:sp>
-      <mc:AlternateContent xmlns:mc="http://schemas.openxmlformats.org/markup-compatibility/2006">
-        <mc:Choice xmlns:a14="http://schemas.microsoft.com/office/drawing/2010/main" Requires="a14">
+      <mc:AlternateContent xmlns:mc="http://schemas.openxmlformats.org/markup-compatibility/2006" xmlns:a14="http://schemas.microsoft.com/office/drawing/2010/main">
+        <mc:Choice Requires="a14">
           <p:sp>
             <p:nvSpPr>
               <p:cNvPr id="3" name="Inhaltsplatzhalter 2">
@@ -8327,7 +8327,7 @@
             </p:txBody>
           </p:sp>
         </mc:Choice>
-        <mc:Fallback>
+        <mc:Fallback xmlns="">
           <p:sp>
             <p:nvSpPr>
               <p:cNvPr id="3" name="Inhaltsplatzhalter 2">
@@ -8400,8 +8400,8 @@
           </a:p>
         </p:txBody>
       </p:sp>
-      <mc:AlternateContent xmlns:mc="http://schemas.openxmlformats.org/markup-compatibility/2006">
-        <mc:Choice xmlns:a14="http://schemas.microsoft.com/office/drawing/2010/main" Requires="a14">
+      <mc:AlternateContent xmlns:mc="http://schemas.openxmlformats.org/markup-compatibility/2006" xmlns:a14="http://schemas.microsoft.com/office/drawing/2010/main">
+        <mc:Choice Requires="a14">
           <p:sp>
             <p:nvSpPr>
               <p:cNvPr id="5" name="Textfeld 4">
@@ -8549,7 +8549,7 @@
             </p:txBody>
           </p:sp>
         </mc:Choice>
-        <mc:Fallback>
+        <mc:Fallback xmlns="">
           <p:sp>
             <p:nvSpPr>
               <p:cNvPr id="5" name="Textfeld 4">
@@ -8635,8 +8635,8 @@
           </a:prstGeom>
         </p:spPr>
       </p:pic>
-      <mc:AlternateContent xmlns:mc="http://schemas.openxmlformats.org/markup-compatibility/2006">
-        <mc:Choice xmlns:a14="http://schemas.microsoft.com/office/drawing/2010/main" Requires="a14">
+      <mc:AlternateContent xmlns:mc="http://schemas.openxmlformats.org/markup-compatibility/2006" xmlns:a14="http://schemas.microsoft.com/office/drawing/2010/main">
+        <mc:Choice Requires="a14">
           <p:sp>
             <p:nvSpPr>
               <p:cNvPr id="8" name="Textfeld 7">
@@ -8763,11 +8763,9 @@
                 <a:endParaRPr lang="de-DE" sz="2800" dirty="0"/>
               </a:p>
               <a:p>
-                <a:pPr/>
                 <a:endParaRPr lang="de-DE" sz="2400" dirty="0"/>
               </a:p>
               <a:p>
-                <a:pPr/>
                 <a:r>
                   <a:rPr lang="de-DE" sz="2400" dirty="0">
                     <a:sym typeface="Wingdings" pitchFamily="2" charset="2"/>
@@ -8824,7 +8822,7 @@
             </p:txBody>
           </p:sp>
         </mc:Choice>
-        <mc:Fallback>
+        <mc:Fallback xmlns="">
           <p:sp>
             <p:nvSpPr>
               <p:cNvPr id="8" name="Textfeld 7">
@@ -9409,8 +9407,8 @@
           </a:p>
         </p:txBody>
       </p:sp>
-      <mc:AlternateContent xmlns:mc="http://schemas.openxmlformats.org/markup-compatibility/2006" xmlns:a14="http://schemas.microsoft.com/office/drawing/2010/main">
-        <mc:Choice Requires="a14">
+      <mc:AlternateContent xmlns:mc="http://schemas.openxmlformats.org/markup-compatibility/2006">
+        <mc:Choice xmlns:a14="http://schemas.microsoft.com/office/drawing/2010/main" Requires="a14">
           <p:sp>
             <p:nvSpPr>
               <p:cNvPr id="3" name="Inhaltsplatzhalter 2">
@@ -9656,66 +9654,6 @@
                         </m:r>
                       </m:e>
                     </m:acc>
-                    <m:r>
-                      <a:rPr lang="de-DE" i="1">
-                        <a:latin typeface="Cambria Math" panose="02040503050406030204" pitchFamily="18" charset="0"/>
-                      </a:rPr>
-                      <m:t>=</m:t>
-                    </m:r>
-                    <m:r>
-                      <a:rPr lang="de-DE" i="1">
-                        <a:latin typeface="Cambria Math" panose="02040503050406030204" pitchFamily="18" charset="0"/>
-                      </a:rPr>
-                      <m:t>𝐴</m:t>
-                    </m:r>
-                    <m:r>
-                      <a:rPr lang="de-DE" i="1">
-                        <a:latin typeface="Cambria Math" panose="02040503050406030204" pitchFamily="18" charset="0"/>
-                      </a:rPr>
-                      <m:t> </m:t>
-                    </m:r>
-                    <m:r>
-                      <a:rPr lang="de-DE" i="1">
-                        <a:latin typeface="Cambria Math" panose="02040503050406030204" pitchFamily="18" charset="0"/>
-                      </a:rPr>
-                      <m:t>𝑥</m:t>
-                    </m:r>
-                    <m:r>
-                      <a:rPr lang="de-DE" i="1">
-                        <a:latin typeface="Cambria Math" panose="02040503050406030204" pitchFamily="18" charset="0"/>
-                      </a:rPr>
-                      <m:t>+</m:t>
-                    </m:r>
-                    <m:r>
-                      <a:rPr lang="de-DE" i="1">
-                        <a:latin typeface="Cambria Math" panose="02040503050406030204" pitchFamily="18" charset="0"/>
-                      </a:rPr>
-                      <m:t>𝐵</m:t>
-                    </m:r>
-                    <m:r>
-                      <a:rPr lang="de-DE" i="1">
-                        <a:latin typeface="Cambria Math" panose="02040503050406030204" pitchFamily="18" charset="0"/>
-                      </a:rPr>
-                      <m:t>−</m:t>
-                    </m:r>
-                    <m:r>
-                      <a:rPr lang="de-DE" i="1">
-                        <a:latin typeface="Cambria Math" panose="02040503050406030204" pitchFamily="18" charset="0"/>
-                      </a:rPr>
-                      <m:t>𝐾</m:t>
-                    </m:r>
-                    <m:r>
-                      <a:rPr lang="de-DE" i="1">
-                        <a:latin typeface="Cambria Math" panose="02040503050406030204" pitchFamily="18" charset="0"/>
-                      </a:rPr>
-                      <m:t> </m:t>
-                    </m:r>
-                    <m:r>
-                      <a:rPr lang="de-DE" i="1">
-                        <a:latin typeface="Cambria Math" panose="02040503050406030204" pitchFamily="18" charset="0"/>
-                      </a:rPr>
-                      <m:t>𝑥</m:t>
-                    </m:r>
                     <m:r>
                       <a:rPr lang="de-DE" b="0" i="1" smtClean="0">
                         <a:latin typeface="Cambria Math" panose="02040503050406030204" pitchFamily="18" charset="0"/>
@@ -9942,7 +9880,7 @@
             </p:txBody>
           </p:sp>
         </mc:Choice>
-        <mc:Fallback xmlns="">
+        <mc:Fallback>
           <p:sp>
             <p:nvSpPr>
               <p:cNvPr id="3" name="Inhaltsplatzhalter 2">
@@ -10191,8 +10129,8 @@
           </a:p>
         </p:txBody>
       </p:sp>
-      <mc:AlternateContent xmlns:mc="http://schemas.openxmlformats.org/markup-compatibility/2006" xmlns:a14="http://schemas.microsoft.com/office/drawing/2010/main">
-        <mc:Choice Requires="a14">
+      <mc:AlternateContent xmlns:mc="http://schemas.openxmlformats.org/markup-compatibility/2006">
+        <mc:Choice xmlns:a14="http://schemas.microsoft.com/office/drawing/2010/main" Requires="a14">
           <p:sp>
             <p:nvSpPr>
               <p:cNvPr id="7" name="Textfeld 6">
@@ -10207,7 +10145,7 @@
             </p:nvSpPr>
             <p:spPr>
               <a:xfrm>
-                <a:off x="5377069" y="3504336"/>
+                <a:off x="5015948" y="3132611"/>
                 <a:ext cx="6698973" cy="830997"/>
               </a:xfrm>
               <a:prstGeom prst="rect">
@@ -10280,26 +10218,6 @@
                             </m:ctrlPr>
                           </m:dPr>
                           <m:e>
-                            <m:r>
-                              <a:rPr lang="de-DE" sz="2400" b="0" i="1" smtClean="0">
-                                <a:latin typeface="Cambria Math" panose="02040503050406030204" pitchFamily="18" charset="0"/>
-                              </a:rPr>
-                              <m:t>𝑠</m:t>
-                            </m:r>
-                            <m:r>
-                              <a:rPr lang="de-DE" sz="2400" b="0" i="1" smtClean="0">
-                                <a:latin typeface="Cambria Math" panose="02040503050406030204" pitchFamily="18" charset="0"/>
-                                <a:ea typeface="Cambria Math" panose="02040503050406030204" pitchFamily="18" charset="0"/>
-                              </a:rPr>
-                              <m:t>𝐼</m:t>
-                            </m:r>
-                            <m:r>
-                              <a:rPr lang="de-DE" sz="2400" b="0" i="1" smtClean="0">
-                                <a:latin typeface="Cambria Math" panose="02040503050406030204" pitchFamily="18" charset="0"/>
-                                <a:ea typeface="Cambria Math" panose="02040503050406030204" pitchFamily="18" charset="0"/>
-                              </a:rPr>
-                              <m:t>−</m:t>
-                            </m:r>
                             <m:r>
                               <a:rPr lang="de-DE" sz="2400" b="0" i="1" smtClean="0">
                                 <a:latin typeface="Cambria Math" panose="02040503050406030204" pitchFamily="18" charset="0"/>
@@ -10321,6 +10239,26 @@
                               </a:rPr>
                               <m:t>𝐵𝐾</m:t>
                             </m:r>
+                            <m:r>
+                              <a:rPr lang="de-DE" sz="2400" b="0" i="1" smtClean="0">
+                                <a:latin typeface="Cambria Math" panose="02040503050406030204" pitchFamily="18" charset="0"/>
+                                <a:ea typeface="Cambria Math" panose="02040503050406030204" pitchFamily="18" charset="0"/>
+                              </a:rPr>
+                              <m:t>−</m:t>
+                            </m:r>
+                            <m:r>
+                              <a:rPr lang="de-DE" sz="2400" i="1">
+                                <a:latin typeface="Cambria Math" panose="02040503050406030204" pitchFamily="18" charset="0"/>
+                              </a:rPr>
+                              <m:t>𝑠</m:t>
+                            </m:r>
+                            <m:r>
+                              <a:rPr lang="de-DE" sz="2400" i="1">
+                                <a:latin typeface="Cambria Math" panose="02040503050406030204" pitchFamily="18" charset="0"/>
+                                <a:ea typeface="Cambria Math" panose="02040503050406030204" pitchFamily="18" charset="0"/>
+                              </a:rPr>
+                              <m:t>𝐼</m:t>
+                            </m:r>
                           </m:e>
                         </m:d>
                         <m:r>
@@ -10362,7 +10300,7 @@
             </p:txBody>
           </p:sp>
         </mc:Choice>
-        <mc:Fallback xmlns="">
+        <mc:Fallback>
           <p:sp>
             <p:nvSpPr>
               <p:cNvPr id="7" name="Textfeld 6">
@@ -10379,7 +10317,7 @@
             </p:nvSpPr>
             <p:spPr>
               <a:xfrm>
-                <a:off x="5377069" y="3504336"/>
+                <a:off x="5015948" y="3132611"/>
                 <a:ext cx="6698973" cy="830997"/>
               </a:xfrm>
               <a:prstGeom prst="rect">
@@ -10388,7 +10326,7 @@
               <a:blipFill>
                 <a:blip r:embed="rId3"/>
                 <a:stretch>
-                  <a:fillRect l="-1515" t="-6061" r="-1136" b="-16667"/>
+                  <a:fillRect l="-1515" t="-6061" r="-947" b="-18182"/>
                 </a:stretch>
               </a:blipFill>
             </p:spPr>
@@ -10421,7 +10359,7 @@
         </p:nvSpPr>
         <p:spPr>
           <a:xfrm rot="16200000">
-            <a:off x="5731724" y="2670466"/>
+            <a:off x="3134439" y="2720005"/>
             <a:ext cx="263074" cy="1393136"/>
           </a:xfrm>
           <a:prstGeom prst="leftBrace">
@@ -11188,6 +11126,45 @@
           </p:sp>
         </mc:Fallback>
       </mc:AlternateContent>
+      <p:cxnSp>
+        <p:nvCxnSpPr>
+          <p:cNvPr id="11" name="Gerade Verbindung mit Pfeil 10">
+            <a:extLst>
+              <a:ext uri="{FF2B5EF4-FFF2-40B4-BE49-F238E27FC236}">
+                <a16:creationId xmlns:a16="http://schemas.microsoft.com/office/drawing/2014/main" id="{5F75C2EE-AEF4-EF5E-F4A7-C9FA86CEC764}"/>
+              </a:ext>
+            </a:extLst>
+          </p:cNvPr>
+          <p:cNvCxnSpPr/>
+          <p:nvPr/>
+        </p:nvCxnSpPr>
+        <p:spPr>
+          <a:xfrm flipH="1">
+            <a:off x="3265976" y="3548110"/>
+            <a:ext cx="1724313" cy="0"/>
+          </a:xfrm>
+          <a:prstGeom prst="straightConnector1">
+            <a:avLst/>
+          </a:prstGeom>
+          <a:ln>
+            <a:tailEnd type="triangle"/>
+          </a:ln>
+        </p:spPr>
+        <p:style>
+          <a:lnRef idx="2">
+            <a:schemeClr val="accent1"/>
+          </a:lnRef>
+          <a:fillRef idx="0">
+            <a:schemeClr val="accent1"/>
+          </a:fillRef>
+          <a:effectRef idx="1">
+            <a:schemeClr val="accent1"/>
+          </a:effectRef>
+          <a:fontRef idx="minor">
+            <a:schemeClr val="tx1"/>
+          </a:fontRef>
+        </p:style>
+      </p:cxnSp>
     </p:spTree>
     <p:extLst>
       <p:ext uri="{BB962C8B-B14F-4D97-AF65-F5344CB8AC3E}">
@@ -11254,8 +11231,8 @@
           </a:p>
         </p:txBody>
       </p:sp>
-      <mc:AlternateContent xmlns:mc="http://schemas.openxmlformats.org/markup-compatibility/2006">
-        <mc:Choice xmlns:a14="http://schemas.microsoft.com/office/drawing/2010/main" Requires="a14">
+      <mc:AlternateContent xmlns:mc="http://schemas.openxmlformats.org/markup-compatibility/2006" xmlns:a14="http://schemas.microsoft.com/office/drawing/2010/main">
+        <mc:Choice Requires="a14">
           <p:sp>
             <p:nvSpPr>
               <p:cNvPr id="3" name="Inhaltsplatzhalter 2">
@@ -11653,14 +11630,7 @@
                       <a:rPr lang="de-DE" b="0" i="1" smtClean="0">
                         <a:latin typeface="Cambria Math" panose="02040503050406030204" pitchFamily="18" charset="0"/>
                       </a:rPr>
-                      <m:t>&gt;</m:t>
-                    </m:r>
-                    <m:r>
-                      <a:rPr lang="de-DE" b="0" i="1" smtClean="0">
-                        <a:latin typeface="Cambria Math" panose="02040503050406030204" pitchFamily="18" charset="0"/>
-                        <a:ea typeface="Cambria Math" panose="02040503050406030204" pitchFamily="18" charset="0"/>
-                      </a:rPr>
-                      <m:t>0</m:t>
+                      <m:t>&gt;0</m:t>
                     </m:r>
                   </m:oMath>
                 </a14:m>
@@ -11896,7 +11866,7 @@
             </p:txBody>
           </p:sp>
         </mc:Choice>
-        <mc:Fallback>
+        <mc:Fallback xmlns="">
           <p:sp>
             <p:nvSpPr>
               <p:cNvPr id="3" name="Inhaltsplatzhalter 2">
@@ -13458,8 +13428,8 @@
           </a:p>
         </p:txBody>
       </p:sp>
-      <mc:AlternateContent xmlns:mc="http://schemas.openxmlformats.org/markup-compatibility/2006">
-        <mc:Choice xmlns:a14="http://schemas.microsoft.com/office/drawing/2010/main" Requires="a14">
+      <mc:AlternateContent xmlns:mc="http://schemas.openxmlformats.org/markup-compatibility/2006" xmlns:a14="http://schemas.microsoft.com/office/drawing/2010/main">
+        <mc:Choice Requires="a14">
           <p:sp>
             <p:nvSpPr>
               <p:cNvPr id="3" name="Inhaltsplatzhalter 2">
@@ -14079,7 +14049,7 @@
             </p:txBody>
           </p:sp>
         </mc:Choice>
-        <mc:Fallback>
+        <mc:Fallback xmlns="">
           <p:sp>
             <p:nvSpPr>
               <p:cNvPr id="3" name="Inhaltsplatzhalter 2">
@@ -14552,8 +14522,8 @@
           </a:p>
         </p:txBody>
       </p:sp>
-      <mc:AlternateContent xmlns:mc="http://schemas.openxmlformats.org/markup-compatibility/2006">
-        <mc:Choice xmlns:a14="http://schemas.microsoft.com/office/drawing/2010/main" Requires="a14">
+      <mc:AlternateContent xmlns:mc="http://schemas.openxmlformats.org/markup-compatibility/2006" xmlns:a14="http://schemas.microsoft.com/office/drawing/2010/main">
+        <mc:Choice Requires="a14">
           <p:sp>
             <p:nvSpPr>
               <p:cNvPr id="3" name="Inhaltsplatzhalter 2">
@@ -14827,7 +14797,7 @@
             </p:txBody>
           </p:sp>
         </mc:Choice>
-        <mc:Fallback>
+        <mc:Fallback xmlns="">
           <p:sp>
             <p:nvSpPr>
               <p:cNvPr id="3" name="Inhaltsplatzhalter 2">
